--- a/AI_Interview_Pro_Presentation.pptx
+++ b/AI_Interview_Pro_Presentation.pptx
@@ -115,12 +115,15 @@
       </a:defRPr>
     </a:lvl9pPr>
   </p:defaultTextStyle>
-  <p:extLst>
-    <p:ext uri="{EFAFB233-063F-42B5-8137-9DF3F51BA10A}">
-      <p15:sldGuideLst xmlns:p15="http://schemas.microsoft.com/office/powerpoint/2012/main"/>
-    </p:ext>
-  </p:extLst>
 </p:presentation>
+</file>
+
+<file path=ppt/revisionInfo.xml><?xml version="1.0" encoding="utf-8"?>
+<p1510:revInfo xmlns:a="http://schemas.openxmlformats.org/drawingml/2006/main" xmlns:r="http://schemas.openxmlformats.org/officeDocument/2006/relationships" xmlns:p1510="http://schemas.microsoft.com/office/powerpoint/2015/10/main">
+  <p1510:revLst>
+    <p1510:client id="{DA8779F8-227F-4DA9-A275-E27C72F44129}" v="34" dt="2026-09-20T18:43:02.724"/>
+  </p1510:revLst>
+</p1510:revInfo>
 </file>
 
 <file path=ppt/changesInfos/changesInfo1.xml><?xml version="1.0" encoding="utf-8"?>
@@ -128,7 +131,7 @@
   <pc:docChgLst>
     <pc:chgData name="Avanish patel" userId="062418370750ffae" providerId="LiveId" clId="{A334F845-472C-4D4D-9045-1CE55D4FCB6C}"/>
     <pc:docChg chg="modSld">
-      <pc:chgData name="Avanish patel" userId="062418370750ffae" providerId="LiveId" clId="{A334F845-472C-4D4D-9045-1CE55D4FCB6C}" dt="2026-09-20T07:38:12.094" v="383" actId="14100"/>
+      <pc:chgData name="Avanish patel" userId="062418370750ffae" providerId="LiveId" clId="{A334F845-472C-4D4D-9045-1CE55D4FCB6C}" dt="2026-09-20T18:43:02.724" v="417" actId="20577"/>
       <pc:docMkLst>
         <pc:docMk/>
       </pc:docMkLst>
@@ -1386,17 +1389,25 @@
         </pc:spChg>
       </pc:sldChg>
       <pc:sldChg chg="modSp mod">
-        <pc:chgData name="Avanish patel" userId="062418370750ffae" providerId="LiveId" clId="{A334F845-472C-4D4D-9045-1CE55D4FCB6C}" dt="2026-09-20T07:26:53.812" v="239" actId="14100"/>
+        <pc:chgData name="Avanish patel" userId="062418370750ffae" providerId="LiveId" clId="{A334F845-472C-4D4D-9045-1CE55D4FCB6C}" dt="2026-09-20T18:43:02.724" v="417" actId="20577"/>
         <pc:sldMkLst>
           <pc:docMk/>
           <pc:sldMk cId="0" sldId="267"/>
         </pc:sldMkLst>
         <pc:spChg chg="mod">
-          <ac:chgData name="Avanish patel" userId="062418370750ffae" providerId="LiveId" clId="{A334F845-472C-4D4D-9045-1CE55D4FCB6C}" dt="2026-09-20T07:26:53.812" v="239" actId="14100"/>
+          <ac:chgData name="Avanish patel" userId="062418370750ffae" providerId="LiveId" clId="{A334F845-472C-4D4D-9045-1CE55D4FCB6C}" dt="2026-09-20T18:42:45.935" v="386" actId="1076"/>
           <ac:spMkLst>
             <pc:docMk/>
             <pc:sldMk cId="0" sldId="267"/>
             <ac:spMk id="2" creationId="{00000000-0000-0000-0000-000000000000}"/>
+          </ac:spMkLst>
+        </pc:spChg>
+        <pc:spChg chg="mod">
+          <ac:chgData name="Avanish patel" userId="062418370750ffae" providerId="LiveId" clId="{A334F845-472C-4D4D-9045-1CE55D4FCB6C}" dt="2026-09-20T18:43:02.724" v="417" actId="20577"/>
+          <ac:spMkLst>
+            <pc:docMk/>
+            <pc:sldMk cId="0" sldId="267"/>
+            <ac:spMk id="5" creationId="{00000000-0000-0000-0000-000000000000}"/>
           </ac:spMkLst>
         </pc:spChg>
       </pc:sldChg>
@@ -1574,7 +1585,7 @@
           <a:bodyPr/>
           <a:lstStyle/>
           <a:p>
-            <a:endParaRPr lang="en-US" dirty="0"/>
+            <a:endParaRPr lang="en-US"/>
           </a:p>
         </p:txBody>
       </p:sp>
@@ -1658,7 +1669,7 @@
           <a:bodyPr/>
           <a:lstStyle/>
           <a:p>
-            <a:endParaRPr lang="en-US" dirty="0"/>
+            <a:endParaRPr lang="en-US"/>
           </a:p>
         </p:txBody>
       </p:sp>
@@ -1742,7 +1753,7 @@
           <a:bodyPr/>
           <a:lstStyle/>
           <a:p>
-            <a:endParaRPr lang="en-US" dirty="0"/>
+            <a:endParaRPr lang="en-US"/>
           </a:p>
         </p:txBody>
       </p:sp>
@@ -1826,7 +1837,7 @@
           <a:bodyPr/>
           <a:lstStyle/>
           <a:p>
-            <a:endParaRPr lang="en-US" dirty="0"/>
+            <a:endParaRPr lang="en-US"/>
           </a:p>
         </p:txBody>
       </p:sp>
@@ -1910,7 +1921,7 @@
           <a:bodyPr/>
           <a:lstStyle/>
           <a:p>
-            <a:endParaRPr lang="en-US" dirty="0"/>
+            <a:endParaRPr lang="en-US"/>
           </a:p>
         </p:txBody>
       </p:sp>
@@ -1994,7 +2005,7 @@
           <a:bodyPr/>
           <a:lstStyle/>
           <a:p>
-            <a:endParaRPr lang="en-US" dirty="0"/>
+            <a:endParaRPr lang="en-US"/>
           </a:p>
         </p:txBody>
       </p:sp>
@@ -2078,7 +2089,7 @@
           <a:bodyPr/>
           <a:lstStyle/>
           <a:p>
-            <a:endParaRPr lang="en-US" dirty="0"/>
+            <a:endParaRPr lang="en-US"/>
           </a:p>
         </p:txBody>
       </p:sp>
@@ -2162,7 +2173,7 @@
           <a:bodyPr/>
           <a:lstStyle/>
           <a:p>
-            <a:endParaRPr lang="en-US" dirty="0"/>
+            <a:endParaRPr lang="en-US"/>
           </a:p>
         </p:txBody>
       </p:sp>
@@ -2246,7 +2257,7 @@
           <a:bodyPr/>
           <a:lstStyle/>
           <a:p>
-            <a:endParaRPr lang="en-US" dirty="0"/>
+            <a:endParaRPr lang="en-US"/>
           </a:p>
         </p:txBody>
       </p:sp>
@@ -2330,7 +2341,7 @@
           <a:bodyPr/>
           <a:lstStyle/>
           <a:p>
-            <a:endParaRPr lang="en-US" dirty="0"/>
+            <a:endParaRPr lang="en-US"/>
           </a:p>
         </p:txBody>
       </p:sp>
@@ -2414,7 +2425,7 @@
           <a:bodyPr/>
           <a:lstStyle/>
           <a:p>
-            <a:endParaRPr lang="en-US" dirty="0"/>
+            <a:endParaRPr lang="en-US"/>
           </a:p>
         </p:txBody>
       </p:sp>
@@ -2498,7 +2509,7 @@
           <a:bodyPr/>
           <a:lstStyle/>
           <a:p>
-            <a:endParaRPr lang="en-US" dirty="0"/>
+            <a:endParaRPr lang="en-US"/>
           </a:p>
         </p:txBody>
       </p:sp>
@@ -2903,7 +2914,7 @@
           <a:bodyPr/>
           <a:lstStyle/>
           <a:p>
-            <a:endParaRPr lang="en-US" dirty="0"/>
+            <a:endParaRPr lang="en-US"/>
           </a:p>
         </p:txBody>
       </p:sp>
@@ -2932,7 +2943,7 @@
               <a:buNone/>
             </a:pPr>
             <a:r>
-              <a:rPr lang="en-US" sz="4000" b="1" dirty="0">
+              <a:rPr lang="en-US" sz="4000" b="1">
                 <a:solidFill>
                   <a:srgbClr val="3B82F6"/>
                 </a:solidFill>
@@ -2942,7 +2953,7 @@
               </a:rPr>
               <a:t>AI INTERVIEW PRO</a:t>
             </a:r>
-            <a:endParaRPr lang="en-US" sz="4000" dirty="0"/>
+            <a:endParaRPr lang="en-US" sz="4000"/>
           </a:p>
         </p:txBody>
       </p:sp>
@@ -2971,7 +2982,7 @@
               <a:buNone/>
             </a:pPr>
             <a:r>
-              <a:rPr lang="en-US" sz="1800" dirty="0">
+              <a:rPr lang="en-US" sz="1800">
                 <a:solidFill>
                   <a:srgbClr val="F8FAFC"/>
                 </a:solidFill>
@@ -2981,7 +2992,7 @@
               </a:rPr>
               <a:t>Next-Generation Production MERN Stack AI Mock Interview Platform</a:t>
             </a:r>
-            <a:endParaRPr lang="en-US" sz="1800" dirty="0"/>
+            <a:endParaRPr lang="en-US" sz="1800"/>
           </a:p>
         </p:txBody>
       </p:sp>
@@ -3010,7 +3021,7 @@
               <a:buNone/>
             </a:pPr>
             <a:r>
-              <a:rPr lang="en-US" sz="1200" dirty="0">
+              <a:rPr lang="en-US" sz="1200">
                 <a:solidFill>
                   <a:srgbClr val="94A3B8"/>
                 </a:solidFill>
@@ -3020,7 +3031,7 @@
               </a:rPr>
               <a:t>Real-Time Voice Assistant • Monaco Coding Lab • Radar Metrics • Resume Skill Scanner • FAANG Tracks</a:t>
             </a:r>
-            <a:endParaRPr lang="en-US" sz="1200" dirty="0"/>
+            <a:endParaRPr lang="en-US" sz="1200"/>
           </a:p>
         </p:txBody>
       </p:sp>
@@ -3049,7 +3060,7 @@
               <a:buNone/>
             </a:pPr>
             <a:r>
-              <a:rPr lang="en-US" sz="1200" b="1" dirty="0">
+              <a:rPr lang="en-US" sz="1200" b="1">
                 <a:solidFill>
                   <a:srgbClr val="8B5CF6"/>
                 </a:solidFill>
@@ -3059,7 +3070,7 @@
               </a:rPr>
               <a:t>Full-Stack Architectural Overview &amp; Project Presentation</a:t>
             </a:r>
-            <a:endParaRPr lang="en-US" sz="1200" dirty="0"/>
+            <a:endParaRPr lang="en-US" sz="1200"/>
           </a:p>
         </p:txBody>
       </p:sp>
@@ -3121,7 +3132,7 @@
               <a:buNone/>
             </a:pPr>
             <a:r>
-              <a:rPr lang="en-US" sz="1100" b="1" dirty="0">
+              <a:rPr lang="en-US" sz="1100" b="1">
                 <a:solidFill>
                   <a:srgbClr val="8B5CF6"/>
                 </a:solidFill>
@@ -3131,7 +3142,7 @@
               </a:rPr>
               <a:t>PLATFORM GOVERNANCE</a:t>
             </a:r>
-            <a:endParaRPr lang="en-US" sz="1100" dirty="0"/>
+            <a:endParaRPr lang="en-US" sz="1100"/>
           </a:p>
         </p:txBody>
       </p:sp>
@@ -3160,7 +3171,7 @@
               <a:buNone/>
             </a:pPr>
             <a:r>
-              <a:rPr lang="en-US" sz="2400" b="1" dirty="0">
+              <a:rPr lang="en-US" sz="2400" b="1">
                 <a:solidFill>
                   <a:srgbClr val="F8FAFC"/>
                 </a:solidFill>
@@ -3170,7 +3181,7 @@
               </a:rPr>
               <a:t>Admin Control Panel &amp; Business Intelligence</a:t>
             </a:r>
-            <a:endParaRPr lang="en-US" sz="2400" dirty="0"/>
+            <a:endParaRPr lang="en-US" sz="2400"/>
           </a:p>
         </p:txBody>
       </p:sp>
@@ -3224,7 +3235,7 @@
               <a:buNone/>
             </a:pPr>
             <a:r>
-              <a:rPr lang="en-US" sz="1800" b="1" dirty="0">
+              <a:rPr lang="en-US" sz="1800" b="1">
                 <a:solidFill>
                   <a:srgbClr val="3B82F6"/>
                 </a:solidFill>
@@ -3234,7 +3245,7 @@
               </a:rPr>
               <a:t>Platform Governance Features</a:t>
             </a:r>
-            <a:endParaRPr lang="en-US" sz="1800" dirty="0"/>
+            <a:endParaRPr lang="en-US" sz="1800"/>
           </a:p>
         </p:txBody>
       </p:sp>
@@ -3266,7 +3277,7 @@
               <a:buNone/>
             </a:pPr>
             <a:r>
-              <a:rPr lang="en-US" sz="1300" dirty="0">
+              <a:rPr lang="en-US" sz="1300">
                 <a:solidFill>
                   <a:srgbClr val="F8FAFC"/>
                 </a:solidFill>
@@ -3276,7 +3287,7 @@
               </a:rPr>
               <a:t>• User Management Suite: View registered candidates, role assignments (User/Admin), and active subscriptions.</a:t>
             </a:r>
-            <a:endParaRPr lang="en-US" sz="1300" dirty="0"/>
+            <a:endParaRPr lang="en-US" sz="1300"/>
           </a:p>
           <a:p>
             <a:pPr marL="0" indent="0">
@@ -3286,7 +3297,7 @@
               <a:buNone/>
             </a:pPr>
             <a:r>
-              <a:rPr lang="en-US" sz="1300" dirty="0">
+              <a:rPr lang="en-US" sz="1300">
                 <a:solidFill>
                   <a:srgbClr val="F8FAFC"/>
                 </a:solidFill>
@@ -3296,7 +3307,7 @@
               </a:rPr>
               <a:t>• Delete User Capabilities: Administrative security controls for platform moderation.</a:t>
             </a:r>
-            <a:endParaRPr lang="en-US" sz="1300" dirty="0"/>
+            <a:endParaRPr lang="en-US" sz="1300"/>
           </a:p>
           <a:p>
             <a:pPr marL="0" indent="0">
@@ -3306,7 +3317,7 @@
               <a:buNone/>
             </a:pPr>
             <a:r>
-              <a:rPr lang="en-US" sz="1300" dirty="0">
+              <a:rPr lang="en-US" sz="1300">
                 <a:solidFill>
                   <a:srgbClr val="F8FAFC"/>
                 </a:solidFill>
@@ -3316,7 +3327,7 @@
               </a:rPr>
               <a:t>• Revenue Dashboard: Visual bar chart metrics tracking monthly subscription earnings ($).</a:t>
             </a:r>
-            <a:endParaRPr lang="en-US" sz="1300" dirty="0"/>
+            <a:endParaRPr lang="en-US" sz="1300"/>
           </a:p>
           <a:p>
             <a:pPr marL="0" indent="0">
@@ -3326,7 +3337,7 @@
               <a:buNone/>
             </a:pPr>
             <a:r>
-              <a:rPr lang="en-US" sz="1300" dirty="0">
+              <a:rPr lang="en-US" sz="1300">
                 <a:solidFill>
                   <a:srgbClr val="F8FAFC"/>
                 </a:solidFill>
@@ -3336,7 +3347,7 @@
               </a:rPr>
               <a:t>• System Analytics: Total interviews completed, total questions answered, and growth rates.</a:t>
             </a:r>
-            <a:endParaRPr lang="en-US" sz="1300" dirty="0"/>
+            <a:endParaRPr lang="en-US" sz="1300"/>
           </a:p>
         </p:txBody>
       </p:sp>
@@ -3398,7 +3409,7 @@
               <a:buNone/>
             </a:pPr>
             <a:r>
-              <a:rPr lang="en-US" sz="1100" b="1" dirty="0">
+              <a:rPr lang="en-US" sz="1100" b="1">
                 <a:solidFill>
                   <a:srgbClr val="8B5CF6"/>
                 </a:solidFill>
@@ -3408,7 +3419,7 @@
               </a:rPr>
               <a:t>BUSINESS MODEL</a:t>
             </a:r>
-            <a:endParaRPr lang="en-US" sz="1100" dirty="0"/>
+            <a:endParaRPr lang="en-US" sz="1100"/>
           </a:p>
         </p:txBody>
       </p:sp>
@@ -3437,7 +3448,7 @@
               <a:buNone/>
             </a:pPr>
             <a:r>
-              <a:rPr lang="en-US" sz="2400" b="1" dirty="0">
+              <a:rPr lang="en-US" sz="2400" b="1">
                 <a:solidFill>
                   <a:srgbClr val="F8FAFC"/>
                 </a:solidFill>
@@ -3447,7 +3458,7 @@
               </a:rPr>
               <a:t>Monetization &amp; Stripe Billing Models</a:t>
             </a:r>
-            <a:endParaRPr lang="en-US" sz="2400" dirty="0"/>
+            <a:endParaRPr lang="en-US" sz="2400"/>
           </a:p>
         </p:txBody>
       </p:sp>
@@ -3501,7 +3512,7 @@
               <a:buNone/>
             </a:pPr>
             <a:r>
-              <a:rPr lang="en-US" sz="1800" b="1" dirty="0">
+              <a:rPr lang="en-US" sz="1800" b="1">
                 <a:solidFill>
                   <a:srgbClr val="F8FAFC"/>
                 </a:solidFill>
@@ -3511,7 +3522,7 @@
               </a:rPr>
               <a:t>Starter Free</a:t>
             </a:r>
-            <a:endParaRPr lang="en-US" sz="1800" dirty="0"/>
+            <a:endParaRPr lang="en-US" sz="1800"/>
           </a:p>
         </p:txBody>
       </p:sp>
@@ -3540,7 +3551,7 @@
               <a:buNone/>
             </a:pPr>
             <a:r>
-              <a:rPr lang="en-US" sz="2200" b="1" dirty="0">
+              <a:rPr lang="en-US" sz="2200" b="1">
                 <a:solidFill>
                   <a:srgbClr val="3B82F6"/>
                 </a:solidFill>
@@ -3550,7 +3561,7 @@
               </a:rPr>
               <a:t>$0 / mo</a:t>
             </a:r>
-            <a:endParaRPr lang="en-US" sz="2200" dirty="0"/>
+            <a:endParaRPr lang="en-US" sz="2200"/>
           </a:p>
         </p:txBody>
       </p:sp>
@@ -3582,7 +3593,7 @@
               <a:buNone/>
             </a:pPr>
             <a:r>
-              <a:rPr lang="en-US" sz="1200" dirty="0">
+              <a:rPr lang="en-US" sz="1200">
                 <a:solidFill>
                   <a:srgbClr val="94A3B8"/>
                 </a:solidFill>
@@ -3592,7 +3603,7 @@
               </a:rPr>
               <a:t>2 AI Mock Interviews / month</a:t>
             </a:r>
-            <a:endParaRPr lang="en-US" sz="1200" dirty="0"/>
+            <a:endParaRPr lang="en-US" sz="1200"/>
           </a:p>
           <a:p>
             <a:pPr marL="0" indent="0">
@@ -3602,7 +3613,7 @@
               <a:buNone/>
             </a:pPr>
             <a:r>
-              <a:rPr lang="en-US" sz="1200" dirty="0">
+              <a:rPr lang="en-US" sz="1200">
                 <a:solidFill>
                   <a:srgbClr val="94A3B8"/>
                 </a:solidFill>
@@ -3612,7 +3623,7 @@
               </a:rPr>
               <a:t>Basic Score Overview</a:t>
             </a:r>
-            <a:endParaRPr lang="en-US" sz="1200" dirty="0"/>
+            <a:endParaRPr lang="en-US" sz="1200"/>
           </a:p>
         </p:txBody>
       </p:sp>
@@ -3666,7 +3677,7 @@
               <a:buNone/>
             </a:pPr>
             <a:r>
-              <a:rPr lang="en-US" sz="1800" b="1" dirty="0">
+              <a:rPr lang="en-US" sz="1800" b="1">
                 <a:solidFill>
                   <a:srgbClr val="8B5CF6"/>
                 </a:solidFill>
@@ -3676,7 +3687,7 @@
               </a:rPr>
               <a:t>Pro Unlimited</a:t>
             </a:r>
-            <a:endParaRPr lang="en-US" sz="1800" dirty="0"/>
+            <a:endParaRPr lang="en-US" sz="1800"/>
           </a:p>
         </p:txBody>
       </p:sp>
@@ -3705,7 +3716,7 @@
               <a:buNone/>
             </a:pPr>
             <a:r>
-              <a:rPr lang="en-US" sz="2200" b="1" dirty="0">
+              <a:rPr lang="en-US" sz="2200" b="1">
                 <a:solidFill>
                   <a:srgbClr val="3B82F6"/>
                 </a:solidFill>
@@ -3715,7 +3726,7 @@
               </a:rPr>
               <a:t>$19 / mo</a:t>
             </a:r>
-            <a:endParaRPr lang="en-US" sz="2200" dirty="0"/>
+            <a:endParaRPr lang="en-US" sz="2200"/>
           </a:p>
         </p:txBody>
       </p:sp>
@@ -3747,7 +3758,7 @@
               <a:buNone/>
             </a:pPr>
             <a:r>
-              <a:rPr lang="en-US" sz="1200" dirty="0">
+              <a:rPr lang="en-US" sz="1200">
                 <a:solidFill>
                   <a:srgbClr val="94A3B8"/>
                 </a:solidFill>
@@ -3757,7 +3768,7 @@
               </a:rPr>
               <a:t>Unlimited AI Voice Rounds</a:t>
             </a:r>
-            <a:endParaRPr lang="en-US" sz="1200" dirty="0"/>
+            <a:endParaRPr lang="en-US" sz="1200"/>
           </a:p>
           <a:p>
             <a:pPr marL="0" indent="0">
@@ -3767,7 +3778,7 @@
               <a:buNone/>
             </a:pPr>
             <a:r>
-              <a:rPr lang="en-US" sz="1200" dirty="0">
+              <a:rPr lang="en-US" sz="1200">
                 <a:solidFill>
                   <a:srgbClr val="94A3B8"/>
                 </a:solidFill>
@@ -3777,7 +3788,7 @@
               </a:rPr>
               <a:t>Monaco Code Sandbox</a:t>
             </a:r>
-            <a:endParaRPr lang="en-US" sz="1200" dirty="0"/>
+            <a:endParaRPr lang="en-US" sz="1200"/>
           </a:p>
           <a:p>
             <a:pPr marL="0" indent="0">
@@ -3787,7 +3798,7 @@
               <a:buNone/>
             </a:pPr>
             <a:r>
-              <a:rPr lang="en-US" sz="1200" dirty="0">
+              <a:rPr lang="en-US" sz="1200">
                 <a:solidFill>
                   <a:srgbClr val="94A3B8"/>
                 </a:solidFill>
@@ -3797,7 +3808,7 @@
               </a:rPr>
               <a:t>All 10 FAANG Tracks</a:t>
             </a:r>
-            <a:endParaRPr lang="en-US" sz="1200" dirty="0"/>
+            <a:endParaRPr lang="en-US" sz="1200"/>
           </a:p>
           <a:p>
             <a:pPr marL="0" indent="0">
@@ -3807,7 +3818,7 @@
               <a:buNone/>
             </a:pPr>
             <a:r>
-              <a:rPr lang="en-US" sz="1200" dirty="0">
+              <a:rPr lang="en-US" sz="1200">
                 <a:solidFill>
                   <a:srgbClr val="94A3B8"/>
                 </a:solidFill>
@@ -3817,7 +3828,7 @@
               </a:rPr>
               <a:t>PDF Reports Download</a:t>
             </a:r>
-            <a:endParaRPr lang="en-US" sz="1200" dirty="0"/>
+            <a:endParaRPr lang="en-US" sz="1200"/>
           </a:p>
         </p:txBody>
       </p:sp>
@@ -3849,7 +3860,7 @@
           <a:bodyPr/>
           <a:lstStyle/>
           <a:p>
-            <a:endParaRPr lang="en-US" dirty="0"/>
+            <a:endParaRPr lang="en-US"/>
           </a:p>
         </p:txBody>
       </p:sp>
@@ -3878,7 +3889,7 @@
               <a:buNone/>
             </a:pPr>
             <a:r>
-              <a:rPr lang="en-US" sz="1800" b="1" dirty="0">
+              <a:rPr lang="en-US" sz="1800" b="1">
                 <a:solidFill>
                   <a:srgbClr val="F8FAFC"/>
                 </a:solidFill>
@@ -3888,7 +3899,7 @@
               </a:rPr>
               <a:t>Enterprise Teams</a:t>
             </a:r>
-            <a:endParaRPr lang="en-US" sz="1800" dirty="0"/>
+            <a:endParaRPr lang="en-US" sz="1800"/>
           </a:p>
         </p:txBody>
       </p:sp>
@@ -3917,7 +3928,7 @@
               <a:buNone/>
             </a:pPr>
             <a:r>
-              <a:rPr lang="en-US" sz="2200" b="1" dirty="0">
+              <a:rPr lang="en-US" sz="2200" b="1">
                 <a:solidFill>
                   <a:srgbClr val="3B82F6"/>
                 </a:solidFill>
@@ -3927,7 +3938,7 @@
               </a:rPr>
               <a:t>$49 / mo</a:t>
             </a:r>
-            <a:endParaRPr lang="en-US" sz="2200" dirty="0"/>
+            <a:endParaRPr lang="en-US" sz="2200"/>
           </a:p>
         </p:txBody>
       </p:sp>
@@ -3959,7 +3970,7 @@
               <a:buNone/>
             </a:pPr>
             <a:r>
-              <a:rPr lang="en-US" sz="1200" dirty="0">
+              <a:rPr lang="en-US" sz="1200">
                 <a:solidFill>
                   <a:srgbClr val="94A3B8"/>
                 </a:solidFill>
@@ -3969,7 +3980,7 @@
               </a:rPr>
               <a:t>Bootcamp &amp; Team Accounts</a:t>
             </a:r>
-            <a:endParaRPr lang="en-US" sz="1200" dirty="0"/>
+            <a:endParaRPr lang="en-US" sz="1200"/>
           </a:p>
           <a:p>
             <a:pPr marL="0" indent="0">
@@ -3979,7 +3990,7 @@
               <a:buNone/>
             </a:pPr>
             <a:r>
-              <a:rPr lang="en-US" sz="1200" dirty="0">
+              <a:rPr lang="en-US" sz="1200">
                 <a:solidFill>
                   <a:srgbClr val="94A3B8"/>
                 </a:solidFill>
@@ -3989,7 +4000,7 @@
               </a:rPr>
               <a:t>Dedicated Account Manager</a:t>
             </a:r>
-            <a:endParaRPr lang="en-US" sz="1200" dirty="0"/>
+            <a:endParaRPr lang="en-US" sz="1200"/>
           </a:p>
           <a:p>
             <a:pPr marL="0" indent="0">
@@ -3999,7 +4010,7 @@
               <a:buNone/>
             </a:pPr>
             <a:r>
-              <a:rPr lang="en-US" sz="1200" dirty="0">
+              <a:rPr lang="en-US" sz="1200">
                 <a:solidFill>
                   <a:srgbClr val="94A3B8"/>
                 </a:solidFill>
@@ -4009,7 +4020,7 @@
               </a:rPr>
               <a:t>Team Progress Analytics</a:t>
             </a:r>
-            <a:endParaRPr lang="en-US" sz="1200" dirty="0"/>
+            <a:endParaRPr lang="en-US" sz="1200"/>
           </a:p>
         </p:txBody>
       </p:sp>
@@ -4054,7 +4065,7 @@
         </p:nvSpPr>
         <p:spPr>
           <a:xfrm>
-            <a:off x="0" y="0"/>
+            <a:off x="0" y="-68580"/>
             <a:ext cx="9144000" cy="5143500"/>
           </a:xfrm>
           <a:prstGeom prst="rect">
@@ -4074,7 +4085,7 @@
           <a:bodyPr/>
           <a:lstStyle/>
           <a:p>
-            <a:endParaRPr lang="en-US" dirty="0"/>
+            <a:endParaRPr lang="en-US"/>
           </a:p>
         </p:txBody>
       </p:sp>
@@ -4103,7 +4114,7 @@
               <a:buNone/>
             </a:pPr>
             <a:r>
-              <a:rPr lang="en-US" sz="4400" b="1" dirty="0">
+              <a:rPr lang="en-US" sz="4400" b="1">
                 <a:solidFill>
                   <a:srgbClr val="3B82F6"/>
                 </a:solidFill>
@@ -4113,7 +4124,7 @@
               </a:rPr>
               <a:t>Thank You!</a:t>
             </a:r>
-            <a:endParaRPr lang="en-US" sz="4400" dirty="0"/>
+            <a:endParaRPr lang="en-US" sz="4400"/>
           </a:p>
         </p:txBody>
       </p:sp>
@@ -4142,7 +4153,7 @@
               <a:buNone/>
             </a:pPr>
             <a:r>
-              <a:rPr lang="en-US" sz="1800" dirty="0">
+              <a:rPr lang="en-US" sz="1800">
                 <a:solidFill>
                   <a:srgbClr val="F8FAFC"/>
                 </a:solidFill>
@@ -4152,7 +4163,7 @@
               </a:rPr>
               <a:t>AI Interview Pro is Ready for Production &amp; Local Access</a:t>
             </a:r>
-            <a:endParaRPr lang="en-US" sz="1800" dirty="0"/>
+            <a:endParaRPr lang="en-US" sz="1800"/>
           </a:p>
         </p:txBody>
       </p:sp>
@@ -4164,8 +4175,8 @@
         </p:nvSpPr>
         <p:spPr>
           <a:xfrm>
-            <a:off x="1097280" y="3291840"/>
-            <a:ext cx="9144000" cy="1645920"/>
+            <a:off x="1097280" y="3550920"/>
+            <a:ext cx="4648200" cy="1386840"/>
           </a:xfrm>
           <a:prstGeom prst="rect">
             <a:avLst/>
@@ -4183,58 +4194,7 @@
               </a:lnSpc>
               <a:buNone/>
             </a:pPr>
-            <a:r>
-              <a:rPr lang="en-US" sz="1400" dirty="0">
-                <a:solidFill>
-                  <a:srgbClr val="94A3B8"/>
-                </a:solidFill>
-                <a:latin typeface="Arial" pitchFamily="34" charset="0"/>
-                <a:ea typeface="Arial" pitchFamily="34" charset="-122"/>
-                <a:cs typeface="Arial" pitchFamily="34" charset="-120"/>
-              </a:rPr>
-              <a:t>• Localhost Access: http://localhost:3000</a:t>
-            </a:r>
-            <a:endParaRPr lang="en-US" sz="1400" dirty="0"/>
-          </a:p>
-          <a:p>
-            <a:pPr marL="0" indent="0">
-              <a:lnSpc>
-                <a:spcPts val="2600"/>
-              </a:lnSpc>
-              <a:buNone/>
-            </a:pPr>
-            <a:r>
-              <a:rPr lang="en-US" sz="1400" dirty="0">
-                <a:solidFill>
-                  <a:srgbClr val="94A3B8"/>
-                </a:solidFill>
-                <a:latin typeface="Arial" pitchFamily="34" charset="0"/>
-                <a:ea typeface="Arial" pitchFamily="34" charset="-122"/>
-                <a:cs typeface="Arial" pitchFamily="34" charset="-120"/>
-              </a:rPr>
-              <a:t>• Backend API Endpoint: http://localhost:5000</a:t>
-            </a:r>
-            <a:endParaRPr lang="en-US" sz="1400" dirty="0"/>
-          </a:p>
-          <a:p>
-            <a:pPr marL="0" indent="0">
-              <a:lnSpc>
-                <a:spcPts val="2600"/>
-              </a:lnSpc>
-              <a:buNone/>
-            </a:pPr>
-            <a:r>
-              <a:rPr lang="en-US" sz="1400" dirty="0">
-                <a:solidFill>
-                  <a:srgbClr val="94A3B8"/>
-                </a:solidFill>
-                <a:latin typeface="Arial" pitchFamily="34" charset="0"/>
-                <a:ea typeface="Arial" pitchFamily="34" charset="-122"/>
-                <a:cs typeface="Arial" pitchFamily="34" charset="-120"/>
-              </a:rPr>
-              <a:t>• Render Blueprint Deployment: 1-Click render.yaml ready</a:t>
-            </a:r>
-            <a:endParaRPr lang="en-US" sz="1400" dirty="0"/>
+            <a:endParaRPr lang="en-US" sz="1400"/>
           </a:p>
         </p:txBody>
       </p:sp>
@@ -4296,7 +4256,7 @@
               <a:buNone/>
             </a:pPr>
             <a:r>
-              <a:rPr lang="en-US" sz="1100" b="1" dirty="0">
+              <a:rPr lang="en-US" sz="1100" b="1">
                 <a:solidFill>
                   <a:srgbClr val="8B5CF6"/>
                 </a:solidFill>
@@ -4306,7 +4266,7 @@
               </a:rPr>
               <a:t>EXECUTIVE OVERVIEW</a:t>
             </a:r>
-            <a:endParaRPr lang="en-US" sz="1100" dirty="0"/>
+            <a:endParaRPr lang="en-US" sz="1100"/>
           </a:p>
         </p:txBody>
       </p:sp>
@@ -4335,7 +4295,7 @@
               <a:buNone/>
             </a:pPr>
             <a:r>
-              <a:rPr lang="en-US" sz="2400" b="1" dirty="0">
+              <a:rPr lang="en-US" sz="2400" b="1">
                 <a:solidFill>
                   <a:srgbClr val="F8FAFC"/>
                 </a:solidFill>
@@ -4345,7 +4305,7 @@
               </a:rPr>
               <a:t>Problem Statement &amp; Platform Solution</a:t>
             </a:r>
-            <a:endParaRPr lang="en-US" sz="2400" dirty="0"/>
+            <a:endParaRPr lang="en-US" sz="2400"/>
           </a:p>
         </p:txBody>
       </p:sp>
@@ -4377,7 +4337,7 @@
           <a:bodyPr/>
           <a:lstStyle/>
           <a:p>
-            <a:endParaRPr lang="en-US" dirty="0"/>
+            <a:endParaRPr lang="en-US"/>
           </a:p>
         </p:txBody>
       </p:sp>
@@ -4406,7 +4366,7 @@
               <a:buNone/>
             </a:pPr>
             <a:r>
-              <a:rPr lang="en-US" sz="1600" b="1" dirty="0">
+              <a:rPr lang="en-US" sz="1600" b="1">
                 <a:solidFill>
                   <a:srgbClr val="FCA5A5"/>
                 </a:solidFill>
@@ -4416,7 +4376,7 @@
               </a:rPr>
               <a:t>The Traditional Problem</a:t>
             </a:r>
-            <a:endParaRPr lang="en-US" sz="1600" dirty="0"/>
+            <a:endParaRPr lang="en-US" sz="1600"/>
           </a:p>
         </p:txBody>
       </p:sp>
@@ -4448,7 +4408,7 @@
               <a:buNone/>
             </a:pPr>
             <a:r>
-              <a:rPr lang="en-US" sz="1200" dirty="0">
+              <a:rPr lang="en-US" sz="1200">
                 <a:solidFill>
                   <a:srgbClr val="94A3B8"/>
                 </a:solidFill>
@@ -4458,7 +4418,7 @@
               </a:rPr>
               <a:t>• High Cost &amp; Unavailability of Human Mock Interviewers</a:t>
             </a:r>
-            <a:endParaRPr lang="en-US" sz="1200" dirty="0"/>
+            <a:endParaRPr lang="en-US" sz="1200"/>
           </a:p>
           <a:p>
             <a:pPr marL="0" indent="0">
@@ -4468,7 +4428,7 @@
               <a:buNone/>
             </a:pPr>
             <a:r>
-              <a:rPr lang="en-US" sz="1200" dirty="0">
+              <a:rPr lang="en-US" sz="1200">
                 <a:solidFill>
                   <a:srgbClr val="94A3B8"/>
                 </a:solidFill>
@@ -4478,7 +4438,7 @@
               </a:rPr>
               <a:t>• Static Q&amp;A Platforms Lack Real Voice Communication Practice</a:t>
             </a:r>
-            <a:endParaRPr lang="en-US" sz="1200" dirty="0"/>
+            <a:endParaRPr lang="en-US" sz="1200"/>
           </a:p>
           <a:p>
             <a:pPr marL="0" indent="0">
@@ -4488,7 +4448,7 @@
               <a:buNone/>
             </a:pPr>
             <a:r>
-              <a:rPr lang="en-US" sz="1200" dirty="0">
+              <a:rPr lang="en-US" sz="1200">
                 <a:solidFill>
                   <a:srgbClr val="94A3B8"/>
                 </a:solidFill>
@@ -4498,7 +4458,7 @@
               </a:rPr>
               <a:t>• No Instant Automated Evaluation of Verbal Confidence &amp; Clarity</a:t>
             </a:r>
-            <a:endParaRPr lang="en-US" sz="1200" dirty="0"/>
+            <a:endParaRPr lang="en-US" sz="1200"/>
           </a:p>
           <a:p>
             <a:pPr marL="0" indent="0">
@@ -4508,7 +4468,7 @@
               <a:buNone/>
             </a:pPr>
             <a:r>
-              <a:rPr lang="en-US" sz="1200" dirty="0">
+              <a:rPr lang="en-US" sz="1200">
                 <a:solidFill>
                   <a:srgbClr val="94A3B8"/>
                 </a:solidFill>
@@ -4518,7 +4478,7 @@
               </a:rPr>
               <a:t>• Coding Practice Detached from Verbal Technical Explanation</a:t>
             </a:r>
-            <a:endParaRPr lang="en-US" sz="1200" dirty="0"/>
+            <a:endParaRPr lang="en-US" sz="1200"/>
           </a:p>
         </p:txBody>
       </p:sp>
@@ -4572,7 +4532,7 @@
               <a:buNone/>
             </a:pPr>
             <a:r>
-              <a:rPr lang="en-US" sz="1600" b="1" dirty="0">
+              <a:rPr lang="en-US" sz="1600" b="1">
                 <a:solidFill>
                   <a:srgbClr val="6EE7B7"/>
                 </a:solidFill>
@@ -4582,7 +4542,7 @@
               </a:rPr>
               <a:t>The AI Interview Pro Solution</a:t>
             </a:r>
-            <a:endParaRPr lang="en-US" sz="1600" dirty="0"/>
+            <a:endParaRPr lang="en-US" sz="1600"/>
           </a:p>
         </p:txBody>
       </p:sp>
@@ -4614,7 +4574,7 @@
               <a:buNone/>
             </a:pPr>
             <a:r>
-              <a:rPr lang="en-US" sz="1200" dirty="0">
+              <a:rPr lang="en-US" sz="1200">
                 <a:solidFill>
                   <a:srgbClr val="F8FAFC"/>
                 </a:solidFill>
@@ -4624,7 +4584,7 @@
               </a:rPr>
               <a:t>• 24/7 AI Voice Evaluator (Web Speech API STT/TTS)</a:t>
             </a:r>
-            <a:endParaRPr lang="en-US" sz="1200" dirty="0"/>
+            <a:endParaRPr lang="en-US" sz="1200"/>
           </a:p>
           <a:p>
             <a:pPr marL="0" indent="0">
@@ -4634,7 +4594,7 @@
               <a:buNone/>
             </a:pPr>
             <a:r>
-              <a:rPr lang="en-US" sz="1200" dirty="0">
+              <a:rPr lang="en-US" sz="1200">
                 <a:solidFill>
                   <a:srgbClr val="F8FAFC"/>
                 </a:solidFill>
@@ -4644,7 +4604,7 @@
               </a:rPr>
               <a:t>• Integrated Monaco Code Editor for Live Algorithm Rounds</a:t>
             </a:r>
-            <a:endParaRPr lang="en-US" sz="1200" dirty="0"/>
+            <a:endParaRPr lang="en-US" sz="1200"/>
           </a:p>
           <a:p>
             <a:pPr marL="0" indent="0">
@@ -4654,7 +4614,7 @@
               <a:buNone/>
             </a:pPr>
             <a:r>
-              <a:rPr lang="en-US" sz="1200" dirty="0">
+              <a:rPr lang="en-US" sz="1200">
                 <a:solidFill>
                   <a:srgbClr val="F8FAFC"/>
                 </a:solidFill>
@@ -4664,7 +4624,7 @@
               </a:rPr>
               <a:t>• 6-Point Radar Metrics (Communication, Technical Depth, Confidence)</a:t>
             </a:r>
-            <a:endParaRPr lang="en-US" sz="1200" dirty="0"/>
+            <a:endParaRPr lang="en-US" sz="1200"/>
           </a:p>
           <a:p>
             <a:pPr marL="0" indent="0">
@@ -4674,7 +4634,7 @@
               <a:buNone/>
             </a:pPr>
             <a:r>
-              <a:rPr lang="en-US" sz="1200" dirty="0">
+              <a:rPr lang="en-US" sz="1200">
                 <a:solidFill>
                   <a:srgbClr val="F8FAFC"/>
                 </a:solidFill>
@@ -4684,7 +4644,7 @@
               </a:rPr>
               <a:t>• Tailored Resume Skill Scanner &amp; Top FAANG Track Modules</a:t>
             </a:r>
-            <a:endParaRPr lang="en-US" sz="1200" dirty="0"/>
+            <a:endParaRPr lang="en-US" sz="1200"/>
           </a:p>
         </p:txBody>
       </p:sp>
@@ -4746,7 +4706,7 @@
               <a:buNone/>
             </a:pPr>
             <a:r>
-              <a:rPr lang="en-US" sz="1100" b="1" dirty="0">
+              <a:rPr lang="en-US" sz="1100" b="1">
                 <a:solidFill>
                   <a:srgbClr val="8B5CF6"/>
                 </a:solidFill>
@@ -4756,7 +4716,7 @@
               </a:rPr>
               <a:t>SYSTEM DESIGN</a:t>
             </a:r>
-            <a:endParaRPr lang="en-US" sz="1100" dirty="0"/>
+            <a:endParaRPr lang="en-US" sz="1100"/>
           </a:p>
         </p:txBody>
       </p:sp>
@@ -4785,7 +4745,7 @@
               <a:buNone/>
             </a:pPr>
             <a:r>
-              <a:rPr lang="en-US" sz="2400" b="1" dirty="0">
+              <a:rPr lang="en-US" sz="2400" b="1">
                 <a:solidFill>
                   <a:srgbClr val="F8FAFC"/>
                 </a:solidFill>
@@ -4795,7 +4755,7 @@
               </a:rPr>
               <a:t>Full-Stack MERN Architecture</a:t>
             </a:r>
-            <a:endParaRPr lang="en-US" sz="2400" dirty="0"/>
+            <a:endParaRPr lang="en-US" sz="2400"/>
           </a:p>
         </p:txBody>
       </p:sp>
@@ -4849,7 +4809,7 @@
               <a:buNone/>
             </a:pPr>
             <a:r>
-              <a:rPr lang="en-US" sz="1600" b="1" dirty="0">
+              <a:rPr lang="en-US" sz="1600" b="1">
                 <a:solidFill>
                   <a:srgbClr val="3B82F6"/>
                 </a:solidFill>
@@ -4859,7 +4819,7 @@
               </a:rPr>
               <a:t>Frontend Layer</a:t>
             </a:r>
-            <a:endParaRPr lang="en-US" sz="1600" dirty="0"/>
+            <a:endParaRPr lang="en-US" sz="1600"/>
           </a:p>
         </p:txBody>
       </p:sp>
@@ -4891,7 +4851,7 @@
               <a:buNone/>
             </a:pPr>
             <a:r>
-              <a:rPr lang="en-US" sz="1200" dirty="0">
+              <a:rPr lang="en-US" sz="1200">
                 <a:solidFill>
                   <a:srgbClr val="94A3B8"/>
                 </a:solidFill>
@@ -4901,7 +4861,7 @@
               </a:rPr>
               <a:t>React.js (Vite), Tailwind CSS, Framer Motion, Recharts, @monaco-editor/react, Lucide Icons</a:t>
             </a:r>
-            <a:endParaRPr lang="en-US" sz="1200" dirty="0"/>
+            <a:endParaRPr lang="en-US" sz="1200"/>
           </a:p>
         </p:txBody>
       </p:sp>
@@ -4955,7 +4915,7 @@
               <a:buNone/>
             </a:pPr>
             <a:r>
-              <a:rPr lang="en-US" sz="1600" b="1" dirty="0">
+              <a:rPr lang="en-US" sz="1600" b="1">
                 <a:solidFill>
                   <a:srgbClr val="3B82F6"/>
                 </a:solidFill>
@@ -4965,7 +4925,7 @@
               </a:rPr>
               <a:t>Backend Layer</a:t>
             </a:r>
-            <a:endParaRPr lang="en-US" sz="1600" dirty="0"/>
+            <a:endParaRPr lang="en-US" sz="1600"/>
           </a:p>
         </p:txBody>
       </p:sp>
@@ -4997,7 +4957,7 @@
               <a:buNone/>
             </a:pPr>
             <a:r>
-              <a:rPr lang="en-US" sz="1200" dirty="0">
+              <a:rPr lang="en-US" sz="1200">
                 <a:solidFill>
                   <a:srgbClr val="94A3B8"/>
                 </a:solidFill>
@@ -5007,7 +4967,7 @@
               </a:rPr>
               <a:t>Node.js, Express.js (MVC), JWT Security, Helmet, Express Rate Limit, Multer, Nodemailer</a:t>
             </a:r>
-            <a:endParaRPr lang="en-US" sz="1200" dirty="0"/>
+            <a:endParaRPr lang="en-US" sz="1200"/>
           </a:p>
         </p:txBody>
       </p:sp>
@@ -5061,7 +5021,7 @@
               <a:buNone/>
             </a:pPr>
             <a:r>
-              <a:rPr lang="en-US" sz="1600" b="1" dirty="0">
+              <a:rPr lang="en-US" sz="1600" b="1">
                 <a:solidFill>
                   <a:srgbClr val="3B82F6"/>
                 </a:solidFill>
@@ -5071,7 +5031,7 @@
               </a:rPr>
               <a:t>Database &amp; Cloud</a:t>
             </a:r>
-            <a:endParaRPr lang="en-US" sz="1600" dirty="0"/>
+            <a:endParaRPr lang="en-US" sz="1600"/>
           </a:p>
         </p:txBody>
       </p:sp>
@@ -5103,7 +5063,7 @@
               <a:buNone/>
             </a:pPr>
             <a:r>
-              <a:rPr lang="en-US" sz="1200" dirty="0">
+              <a:rPr lang="en-US" sz="1200">
                 <a:solidFill>
                   <a:srgbClr val="94A3B8"/>
                 </a:solidFill>
@@ -5113,7 +5073,7 @@
               </a:rPr>
               <a:t>MongoDB Atlas &amp; Mongoose Schemas (User, Interview, Answer, Report, Coding, Payment)</a:t>
             </a:r>
-            <a:endParaRPr lang="en-US" sz="1200" dirty="0"/>
+            <a:endParaRPr lang="en-US" sz="1200"/>
           </a:p>
         </p:txBody>
       </p:sp>
@@ -5167,7 +5127,7 @@
               <a:buNone/>
             </a:pPr>
             <a:r>
-              <a:rPr lang="en-US" sz="1600" b="1" dirty="0">
+              <a:rPr lang="en-US" sz="1600" b="1">
                 <a:solidFill>
                   <a:srgbClr val="3B82F6"/>
                 </a:solidFill>
@@ -5177,7 +5137,7 @@
               </a:rPr>
               <a:t>AI &amp; Services</a:t>
             </a:r>
-            <a:endParaRPr lang="en-US" sz="1600" dirty="0"/>
+            <a:endParaRPr lang="en-US" sz="1600"/>
           </a:p>
         </p:txBody>
       </p:sp>
@@ -5209,7 +5169,7 @@
               <a:buNone/>
             </a:pPr>
             <a:r>
-              <a:rPr lang="en-US" sz="1200" dirty="0">
+              <a:rPr lang="en-US" sz="1200">
                 <a:solidFill>
                   <a:srgbClr val="94A3B8"/>
                 </a:solidFill>
@@ -5219,7 +5179,7 @@
               </a:rPr>
               <a:t>OpenAI GPT API, Web Speech API (STT/TTS), PDF Generator Engine, Stripe Payments</a:t>
             </a:r>
-            <a:endParaRPr lang="en-US" sz="1200" dirty="0"/>
+            <a:endParaRPr lang="en-US" sz="1200"/>
           </a:p>
         </p:txBody>
       </p:sp>
@@ -5281,7 +5241,7 @@
               <a:buNone/>
             </a:pPr>
             <a:r>
-              <a:rPr lang="en-US" sz="1100" b="1" dirty="0">
+              <a:rPr lang="en-US" sz="1100" b="1">
                 <a:solidFill>
                   <a:srgbClr val="8B5CF6"/>
                 </a:solidFill>
@@ -5291,7 +5251,7 @@
               </a:rPr>
               <a:t>PLATFORM CAPABILITIES</a:t>
             </a:r>
-            <a:endParaRPr lang="en-US" sz="1100" dirty="0"/>
+            <a:endParaRPr lang="en-US" sz="1100"/>
           </a:p>
         </p:txBody>
       </p:sp>
@@ -5320,7 +5280,7 @@
               <a:buNone/>
             </a:pPr>
             <a:r>
-              <a:rPr lang="en-US" sz="2400" b="1" dirty="0">
+              <a:rPr lang="en-US" sz="2400" b="1">
                 <a:solidFill>
                   <a:srgbClr val="F8FAFC"/>
                 </a:solidFill>
@@ -5330,7 +5290,7 @@
               </a:rPr>
               <a:t>Comprehensive Feature Ecosystem (17 Sections)</a:t>
             </a:r>
-            <a:endParaRPr lang="en-US" sz="2400" dirty="0"/>
+            <a:endParaRPr lang="en-US" sz="2400"/>
           </a:p>
         </p:txBody>
       </p:sp>
@@ -5384,7 +5344,7 @@
               <a:buNone/>
             </a:pPr>
             <a:r>
-              <a:rPr lang="en-US" sz="1100" b="1" dirty="0">
+              <a:rPr lang="en-US" sz="1100" b="1">
                 <a:solidFill>
                   <a:srgbClr val="F8FAFC"/>
                 </a:solidFill>
@@ -5394,7 +5354,7 @@
               </a:rPr>
               <a:t>✓  JWT &amp; Google OAuth Auth</a:t>
             </a:r>
-            <a:endParaRPr lang="en-US" sz="1100" dirty="0"/>
+            <a:endParaRPr lang="en-US" sz="1100"/>
           </a:p>
         </p:txBody>
       </p:sp>
@@ -5448,7 +5408,7 @@
               <a:buNone/>
             </a:pPr>
             <a:r>
-              <a:rPr lang="en-US" sz="1100" b="1" dirty="0">
+              <a:rPr lang="en-US" sz="1100" b="1">
                 <a:solidFill>
                   <a:srgbClr val="F8FAFC"/>
                 </a:solidFill>
@@ -5458,7 +5418,7 @@
               </a:rPr>
               <a:t>✓  Interactive AI Dashboard</a:t>
             </a:r>
-            <a:endParaRPr lang="en-US" sz="1100" dirty="0"/>
+            <a:endParaRPr lang="en-US" sz="1100"/>
           </a:p>
         </p:txBody>
       </p:sp>
@@ -5512,7 +5472,7 @@
               <a:buNone/>
             </a:pPr>
             <a:r>
-              <a:rPr lang="en-US" sz="1100" b="1" dirty="0">
+              <a:rPr lang="en-US" sz="1100" b="1">
                 <a:solidFill>
                   <a:srgbClr val="F8FAFC"/>
                 </a:solidFill>
@@ -5522,7 +5482,7 @@
               </a:rPr>
               <a:t>✓  18 Interview Categories</a:t>
             </a:r>
-            <a:endParaRPr lang="en-US" sz="1100" dirty="0"/>
+            <a:endParaRPr lang="en-US" sz="1100"/>
           </a:p>
         </p:txBody>
       </p:sp>
@@ -5576,7 +5536,7 @@
               <a:buNone/>
             </a:pPr>
             <a:r>
-              <a:rPr lang="en-US" sz="1100" b="1" dirty="0">
+              <a:rPr lang="en-US" sz="1100" b="1">
                 <a:solidFill>
                   <a:srgbClr val="F8FAFC"/>
                 </a:solidFill>
@@ -5586,7 +5546,7 @@
               </a:rPr>
               <a:t>✓  Custom Difficulty &amp; Duration</a:t>
             </a:r>
-            <a:endParaRPr lang="en-US" sz="1100" dirty="0"/>
+            <a:endParaRPr lang="en-US" sz="1100"/>
           </a:p>
         </p:txBody>
       </p:sp>
@@ -5640,7 +5600,7 @@
               <a:buNone/>
             </a:pPr>
             <a:r>
-              <a:rPr lang="en-US" sz="1100" b="1" dirty="0">
+              <a:rPr lang="en-US" sz="1100" b="1">
                 <a:solidFill>
                   <a:srgbClr val="F8FAFC"/>
                 </a:solidFill>
@@ -5650,7 +5610,7 @@
               </a:rPr>
               <a:t>✓  Voice STT &amp; TTS Engine</a:t>
             </a:r>
-            <a:endParaRPr lang="en-US" sz="1100" dirty="0"/>
+            <a:endParaRPr lang="en-US" sz="1100"/>
           </a:p>
         </p:txBody>
       </p:sp>
@@ -5704,7 +5664,7 @@
               <a:buNone/>
             </a:pPr>
             <a:r>
-              <a:rPr lang="en-US" sz="1100" b="1" dirty="0">
+              <a:rPr lang="en-US" sz="1100" b="1">
                 <a:solidFill>
                   <a:srgbClr val="F8FAFC"/>
                 </a:solidFill>
@@ -5714,7 +5674,7 @@
               </a:rPr>
               <a:t>✓  6-Point Radar Metrics</a:t>
             </a:r>
-            <a:endParaRPr lang="en-US" sz="1100" dirty="0"/>
+            <a:endParaRPr lang="en-US" sz="1100"/>
           </a:p>
         </p:txBody>
       </p:sp>
@@ -5768,7 +5728,7 @@
               <a:buNone/>
             </a:pPr>
             <a:r>
-              <a:rPr lang="en-US" sz="1100" b="1" dirty="0">
+              <a:rPr lang="en-US" sz="1100" b="1">
                 <a:solidFill>
                   <a:srgbClr val="F8FAFC"/>
                 </a:solidFill>
@@ -5778,7 +5738,7 @@
               </a:rPr>
               <a:t>✓  Printable PDF Reports</a:t>
             </a:r>
-            <a:endParaRPr lang="en-US" sz="1100" dirty="0"/>
+            <a:endParaRPr lang="en-US" sz="1100"/>
           </a:p>
         </p:txBody>
       </p:sp>
@@ -5810,7 +5770,7 @@
           <a:bodyPr/>
           <a:lstStyle/>
           <a:p>
-            <a:endParaRPr lang="en-US" dirty="0"/>
+            <a:endParaRPr lang="en-US"/>
           </a:p>
         </p:txBody>
       </p:sp>
@@ -5839,7 +5799,7 @@
               <a:buNone/>
             </a:pPr>
             <a:r>
-              <a:rPr lang="en-US" sz="1100" b="1" dirty="0">
+              <a:rPr lang="en-US" sz="1100" b="1">
                 <a:solidFill>
                   <a:srgbClr val="F8FAFC"/>
                 </a:solidFill>
@@ -5849,7 +5809,7 @@
               </a:rPr>
               <a:t>✓  Resume Skill Extractor</a:t>
             </a:r>
-            <a:endParaRPr lang="en-US" sz="1100" dirty="0"/>
+            <a:endParaRPr lang="en-US" sz="1100"/>
           </a:p>
         </p:txBody>
       </p:sp>
@@ -5903,7 +5863,7 @@
               <a:buNone/>
             </a:pPr>
             <a:r>
-              <a:rPr lang="en-US" sz="1100" b="1" dirty="0">
+              <a:rPr lang="en-US" sz="1100" b="1">
                 <a:solidFill>
                   <a:srgbClr val="F8FAFC"/>
                 </a:solidFill>
@@ -5913,7 +5873,7 @@
               </a:rPr>
               <a:t>✓  10 FAANG Company Tracks</a:t>
             </a:r>
-            <a:endParaRPr lang="en-US" sz="1100" dirty="0"/>
+            <a:endParaRPr lang="en-US" sz="1100"/>
           </a:p>
         </p:txBody>
       </p:sp>
@@ -5967,7 +5927,7 @@
               <a:buNone/>
             </a:pPr>
             <a:r>
-              <a:rPr lang="en-US" sz="1100" b="1" dirty="0">
+              <a:rPr lang="en-US" sz="1100" b="1">
                 <a:solidFill>
                   <a:srgbClr val="F8FAFC"/>
                 </a:solidFill>
@@ -5977,7 +5937,7 @@
               </a:rPr>
               <a:t>✓  Monaco Code Editor</a:t>
             </a:r>
-            <a:endParaRPr lang="en-US" sz="1100" dirty="0"/>
+            <a:endParaRPr lang="en-US" sz="1100"/>
           </a:p>
         </p:txBody>
       </p:sp>
@@ -6031,7 +5991,7 @@
               <a:buNone/>
             </a:pPr>
             <a:r>
-              <a:rPr lang="en-US" sz="1100" b="1" dirty="0">
+              <a:rPr lang="en-US" sz="1100" b="1">
                 <a:solidFill>
                   <a:srgbClr val="F8FAFC"/>
                 </a:solidFill>
@@ -6041,7 +6001,7 @@
               </a:rPr>
               <a:t>✓  Hidden Test Cases Runner</a:t>
             </a:r>
-            <a:endParaRPr lang="en-US" sz="1100" dirty="0"/>
+            <a:endParaRPr lang="en-US" sz="1100"/>
           </a:p>
         </p:txBody>
       </p:sp>
@@ -6095,7 +6055,7 @@
               <a:buNone/>
             </a:pPr>
             <a:r>
-              <a:rPr lang="en-US" sz="1100" b="1" dirty="0">
+              <a:rPr lang="en-US" sz="1100" b="1">
                 <a:solidFill>
                   <a:srgbClr val="F8FAFC"/>
                 </a:solidFill>
@@ -6105,7 +6065,7 @@
               </a:rPr>
               <a:t>✓  AI Code Complexity Analysis</a:t>
             </a:r>
-            <a:endParaRPr lang="en-US" sz="1100" dirty="0"/>
+            <a:endParaRPr lang="en-US" sz="1100"/>
           </a:p>
         </p:txBody>
       </p:sp>
@@ -6159,7 +6119,7 @@
               <a:buNone/>
             </a:pPr>
             <a:r>
-              <a:rPr lang="en-US" sz="1100" b="1" dirty="0">
+              <a:rPr lang="en-US" sz="1100" b="1">
                 <a:solidFill>
                   <a:srgbClr val="F8FAFC"/>
                 </a:solidFill>
@@ -6169,7 +6129,7 @@
               </a:rPr>
               <a:t>✓  Admin Command Panel</a:t>
             </a:r>
-            <a:endParaRPr lang="en-US" sz="1100" dirty="0"/>
+            <a:endParaRPr lang="en-US" sz="1100"/>
           </a:p>
         </p:txBody>
       </p:sp>
@@ -6201,7 +6161,7 @@
           <a:bodyPr/>
           <a:lstStyle/>
           <a:p>
-            <a:endParaRPr lang="en-US" dirty="0"/>
+            <a:endParaRPr lang="en-US"/>
           </a:p>
         </p:txBody>
       </p:sp>
@@ -6230,7 +6190,7 @@
               <a:buNone/>
             </a:pPr>
             <a:r>
-              <a:rPr lang="en-US" sz="1100" b="1" dirty="0">
+              <a:rPr lang="en-US" sz="1100" b="1">
                 <a:solidFill>
                   <a:srgbClr val="F8FAFC"/>
                 </a:solidFill>
@@ -6240,7 +6200,7 @@
               </a:rPr>
               <a:t>✓  Stripe Billing Integration</a:t>
             </a:r>
-            <a:endParaRPr lang="en-US" sz="1100" dirty="0"/>
+            <a:endParaRPr lang="en-US" sz="1100"/>
           </a:p>
         </p:txBody>
       </p:sp>
@@ -6294,7 +6254,7 @@
               <a:buNone/>
             </a:pPr>
             <a:r>
-              <a:rPr lang="en-US" sz="1100" b="1" dirty="0">
+              <a:rPr lang="en-US" sz="1100" b="1">
                 <a:solidFill>
                   <a:srgbClr val="F8FAFC"/>
                 </a:solidFill>
@@ -6304,7 +6264,7 @@
               </a:rPr>
               <a:t>✓  Leaderboards &amp; Badges</a:t>
             </a:r>
-            <a:endParaRPr lang="en-US" sz="1100" dirty="0"/>
+            <a:endParaRPr lang="en-US" sz="1100"/>
           </a:p>
         </p:txBody>
       </p:sp>
@@ -6366,7 +6326,7 @@
               <a:buNone/>
             </a:pPr>
             <a:r>
-              <a:rPr lang="en-US" sz="1100" b="1" dirty="0">
+              <a:rPr lang="en-US" sz="1100" b="1">
                 <a:solidFill>
                   <a:srgbClr val="8B5CF6"/>
                 </a:solidFill>
@@ -6376,7 +6336,7 @@
               </a:rPr>
               <a:t>CORE INNOVATION</a:t>
             </a:r>
-            <a:endParaRPr lang="en-US" sz="1100" dirty="0"/>
+            <a:endParaRPr lang="en-US" sz="1100"/>
           </a:p>
         </p:txBody>
       </p:sp>
@@ -6405,7 +6365,7 @@
               <a:buNone/>
             </a:pPr>
             <a:r>
-              <a:rPr lang="en-US" sz="2400" b="1" dirty="0">
+              <a:rPr lang="en-US" sz="2400" b="1">
                 <a:solidFill>
                   <a:srgbClr val="F8FAFC"/>
                 </a:solidFill>
@@ -6415,7 +6375,7 @@
               </a:rPr>
               <a:t>AI Voice &amp; Speech Recognition Engine</a:t>
             </a:r>
-            <a:endParaRPr lang="en-US" sz="2400" dirty="0"/>
+            <a:endParaRPr lang="en-US" sz="2400"/>
           </a:p>
         </p:txBody>
       </p:sp>
@@ -6469,7 +6429,7 @@
               <a:buNone/>
             </a:pPr>
             <a:r>
-              <a:rPr lang="en-US" sz="1800" b="1" dirty="0">
+              <a:rPr lang="en-US" sz="1800" b="1">
                 <a:solidFill>
                   <a:srgbClr val="3B82F6"/>
                 </a:solidFill>
@@ -6479,7 +6439,7 @@
               </a:rPr>
               <a:t>Real-Time Voice Assistant Architecture</a:t>
             </a:r>
-            <a:endParaRPr lang="en-US" sz="1800" dirty="0"/>
+            <a:endParaRPr lang="en-US" sz="1800"/>
           </a:p>
         </p:txBody>
       </p:sp>
@@ -6511,7 +6471,7 @@
               <a:buNone/>
             </a:pPr>
             <a:r>
-              <a:rPr lang="en-US" sz="1300" dirty="0">
+              <a:rPr lang="en-US" sz="1300">
                 <a:solidFill>
                   <a:srgbClr val="F8FAFC"/>
                 </a:solidFill>
@@ -6521,7 +6481,7 @@
               </a:rPr>
               <a:t>1. Text-to-Speech (TTS): AI interviewer speaks questions aloud with custom pitch &amp; rate controls.</a:t>
             </a:r>
-            <a:endParaRPr lang="en-US" sz="1300" dirty="0"/>
+            <a:endParaRPr lang="en-US" sz="1300"/>
           </a:p>
           <a:p>
             <a:pPr marL="0" indent="0">
@@ -6531,7 +6491,7 @@
               <a:buNone/>
             </a:pPr>
             <a:r>
-              <a:rPr lang="en-US" sz="1300" dirty="0">
+              <a:rPr lang="en-US" sz="1300">
                 <a:solidFill>
                   <a:srgbClr val="F8FAFC"/>
                 </a:solidFill>
@@ -6541,7 +6501,7 @@
               </a:rPr>
               <a:t>2. Speech-to-Text (STT): WebSpeech API captures candidate microphone audio and converts it to continuous transcript.</a:t>
             </a:r>
-            <a:endParaRPr lang="en-US" sz="1300" dirty="0"/>
+            <a:endParaRPr lang="en-US" sz="1300"/>
           </a:p>
           <a:p>
             <a:pPr marL="0" indent="0">
@@ -6551,7 +6511,7 @@
               <a:buNone/>
             </a:pPr>
             <a:r>
-              <a:rPr lang="en-US" sz="1300" dirty="0">
+              <a:rPr lang="en-US" sz="1300">
                 <a:solidFill>
                   <a:srgbClr val="F8FAFC"/>
                 </a:solidFill>
@@ -6561,7 +6521,7 @@
               </a:rPr>
               <a:t>3. Question Timer Ring: 120-second dynamic timer per question with Skip, Repeat, and End actions.</a:t>
             </a:r>
-            <a:endParaRPr lang="en-US" sz="1300" dirty="0"/>
+            <a:endParaRPr lang="en-US" sz="1300"/>
           </a:p>
           <a:p>
             <a:pPr marL="0" indent="0">
@@ -6571,7 +6531,7 @@
               <a:buNone/>
             </a:pPr>
             <a:r>
-              <a:rPr lang="en-US" sz="1300" dirty="0">
+              <a:rPr lang="en-US" sz="1300">
                 <a:solidFill>
                   <a:srgbClr val="F8FAFC"/>
                 </a:solidFill>
@@ -6581,7 +6541,7 @@
               </a:rPr>
               <a:t>4. Real-time Audio Wave Visualizer: Provides responsive visual feedback while candidate or AI is speaking.</a:t>
             </a:r>
-            <a:endParaRPr lang="en-US" sz="1300" dirty="0"/>
+            <a:endParaRPr lang="en-US" sz="1300"/>
           </a:p>
         </p:txBody>
       </p:sp>
@@ -6643,7 +6603,7 @@
               <a:buNone/>
             </a:pPr>
             <a:r>
-              <a:rPr lang="en-US" sz="1100" b="1" dirty="0">
+              <a:rPr lang="en-US" sz="1100" b="1">
                 <a:solidFill>
                   <a:srgbClr val="8B5CF6"/>
                 </a:solidFill>
@@ -6653,7 +6613,7 @@
               </a:rPr>
               <a:t>CODING LAB</a:t>
             </a:r>
-            <a:endParaRPr lang="en-US" sz="1100" dirty="0"/>
+            <a:endParaRPr lang="en-US" sz="1100"/>
           </a:p>
         </p:txBody>
       </p:sp>
@@ -6682,7 +6642,7 @@
               <a:buNone/>
             </a:pPr>
             <a:r>
-              <a:rPr lang="en-US" sz="2400" b="1" dirty="0">
+              <a:rPr lang="en-US" sz="2400" b="1">
                 <a:solidFill>
                   <a:srgbClr val="F8FAFC"/>
                 </a:solidFill>
@@ -6692,7 +6652,7 @@
               </a:rPr>
               <a:t>Live Monaco Code Sandbox &amp; AI Analysis</a:t>
             </a:r>
-            <a:endParaRPr lang="en-US" sz="2400" dirty="0"/>
+            <a:endParaRPr lang="en-US" sz="2400"/>
           </a:p>
         </p:txBody>
       </p:sp>
@@ -6746,7 +6706,7 @@
               <a:buNone/>
             </a:pPr>
             <a:r>
-              <a:rPr lang="en-US" sz="1600" b="1" dirty="0">
+              <a:rPr lang="en-US" sz="1600" b="1">
                 <a:solidFill>
                   <a:srgbClr val="3B82F6"/>
                 </a:solidFill>
@@ -6756,7 +6716,7 @@
               </a:rPr>
               <a:t>Integrated Monaco IDE Features</a:t>
             </a:r>
-            <a:endParaRPr lang="en-US" sz="1600" dirty="0"/>
+            <a:endParaRPr lang="en-US" sz="1600"/>
           </a:p>
         </p:txBody>
       </p:sp>
@@ -6788,7 +6748,7 @@
               <a:buNone/>
             </a:pPr>
             <a:r>
-              <a:rPr lang="en-US" sz="1200" dirty="0">
+              <a:rPr lang="en-US" sz="1200">
                 <a:solidFill>
                   <a:srgbClr val="F8FAFC"/>
                 </a:solidFill>
@@ -6798,7 +6758,7 @@
               </a:rPr>
               <a:t>• Supports JavaScript, Python, C++, and Java</a:t>
             </a:r>
-            <a:endParaRPr lang="en-US" sz="1200" dirty="0"/>
+            <a:endParaRPr lang="en-US" sz="1200"/>
           </a:p>
           <a:p>
             <a:pPr marL="0" indent="0">
@@ -6808,7 +6768,7 @@
               <a:buNone/>
             </a:pPr>
             <a:r>
-              <a:rPr lang="en-US" sz="1200" dirty="0">
+              <a:rPr lang="en-US" sz="1200">
                 <a:solidFill>
                   <a:srgbClr val="F8FAFC"/>
                 </a:solidFill>
@@ -6818,7 +6778,7 @@
               </a:rPr>
               <a:t>• Real-Time Test Case Execution Runner</a:t>
             </a:r>
-            <a:endParaRPr lang="en-US" sz="1200" dirty="0"/>
+            <a:endParaRPr lang="en-US" sz="1200"/>
           </a:p>
           <a:p>
             <a:pPr marL="0" indent="0">
@@ -6828,7 +6788,7 @@
               <a:buNone/>
             </a:pPr>
             <a:r>
-              <a:rPr lang="en-US" sz="1200" dirty="0">
+              <a:rPr lang="en-US" sz="1200">
                 <a:solidFill>
                   <a:srgbClr val="F8FAFC"/>
                 </a:solidFill>
@@ -6838,7 +6798,7 @@
               </a:rPr>
               <a:t>• Execution Time (ms) &amp; Memory Usage (MB)</a:t>
             </a:r>
-            <a:endParaRPr lang="en-US" sz="1200" dirty="0"/>
+            <a:endParaRPr lang="en-US" sz="1200"/>
           </a:p>
           <a:p>
             <a:pPr marL="0" indent="0">
@@ -6848,7 +6808,7 @@
               <a:buNone/>
             </a:pPr>
             <a:r>
-              <a:rPr lang="en-US" sz="1200" dirty="0">
+              <a:rPr lang="en-US" sz="1200">
                 <a:solidFill>
                   <a:srgbClr val="F8FAFC"/>
                 </a:solidFill>
@@ -6858,7 +6818,7 @@
               </a:rPr>
               <a:t>• Syntax Highlighting &amp; VS Dark Theme</a:t>
             </a:r>
-            <a:endParaRPr lang="en-US" sz="1200" dirty="0"/>
+            <a:endParaRPr lang="en-US" sz="1200"/>
           </a:p>
         </p:txBody>
       </p:sp>
@@ -6912,7 +6872,7 @@
               <a:buNone/>
             </a:pPr>
             <a:r>
-              <a:rPr lang="en-US" sz="1600" b="1" dirty="0">
+              <a:rPr lang="en-US" sz="1600" b="1">
                 <a:solidFill>
                   <a:srgbClr val="8B5CF6"/>
                 </a:solidFill>
@@ -6922,7 +6882,7 @@
               </a:rPr>
               <a:t>AI Code Optimization Feedback</a:t>
             </a:r>
-            <a:endParaRPr lang="en-US" sz="1600" dirty="0"/>
+            <a:endParaRPr lang="en-US" sz="1600"/>
           </a:p>
         </p:txBody>
       </p:sp>
@@ -6954,7 +6914,7 @@
               <a:buNone/>
             </a:pPr>
             <a:r>
-              <a:rPr lang="en-US" sz="1200" dirty="0">
+              <a:rPr lang="en-US" sz="1200">
                 <a:solidFill>
                   <a:srgbClr val="F8FAFC"/>
                 </a:solidFill>
@@ -6964,7 +6924,7 @@
               </a:rPr>
               <a:t>• Automated Time Complexity Evaluation (O(N))</a:t>
             </a:r>
-            <a:endParaRPr lang="en-US" sz="1200" dirty="0"/>
+            <a:endParaRPr lang="en-US" sz="1200"/>
           </a:p>
           <a:p>
             <a:pPr marL="0" indent="0">
@@ -6974,7 +6934,7 @@
               <a:buNone/>
             </a:pPr>
             <a:r>
-              <a:rPr lang="en-US" sz="1200" dirty="0">
+              <a:rPr lang="en-US" sz="1200">
                 <a:solidFill>
                   <a:srgbClr val="F8FAFC"/>
                 </a:solidFill>
@@ -6984,7 +6944,7 @@
               </a:rPr>
               <a:t>• Auxiliary Space Complexity Calculation</a:t>
             </a:r>
-            <a:endParaRPr lang="en-US" sz="1200" dirty="0"/>
+            <a:endParaRPr lang="en-US" sz="1200"/>
           </a:p>
           <a:p>
             <a:pPr marL="0" indent="0">
@@ -6994,7 +6954,7 @@
               <a:buNone/>
             </a:pPr>
             <a:r>
-              <a:rPr lang="en-US" sz="1200" dirty="0">
+              <a:rPr lang="en-US" sz="1200">
                 <a:solidFill>
                   <a:srgbClr val="F8FAFC"/>
                 </a:solidFill>
@@ -7004,7 +6964,7 @@
               </a:rPr>
               <a:t>• Modular Code Quality Rating &amp; Clean Tips</a:t>
             </a:r>
-            <a:endParaRPr lang="en-US" sz="1200" dirty="0"/>
+            <a:endParaRPr lang="en-US" sz="1200"/>
           </a:p>
           <a:p>
             <a:pPr marL="0" indent="0">
@@ -7014,7 +6974,7 @@
               <a:buNone/>
             </a:pPr>
             <a:r>
-              <a:rPr lang="en-US" sz="1200" dirty="0">
+              <a:rPr lang="en-US" sz="1200">
                 <a:solidFill>
                   <a:srgbClr val="F8FAFC"/>
                 </a:solidFill>
@@ -7024,7 +6984,7 @@
               </a:rPr>
               <a:t>• Optimized Alternative Solution Snippets</a:t>
             </a:r>
-            <a:endParaRPr lang="en-US" sz="1200" dirty="0"/>
+            <a:endParaRPr lang="en-US" sz="1200"/>
           </a:p>
         </p:txBody>
       </p:sp>
@@ -7086,7 +7046,7 @@
               <a:buNone/>
             </a:pPr>
             <a:r>
-              <a:rPr lang="en-US" sz="1100" b="1" dirty="0">
+              <a:rPr lang="en-US" sz="1100" b="1">
                 <a:solidFill>
                   <a:srgbClr val="8B5CF6"/>
                 </a:solidFill>
@@ -7096,7 +7056,7 @@
               </a:rPr>
               <a:t>PERFORMANCE SCORING</a:t>
             </a:r>
-            <a:endParaRPr lang="en-US" sz="1100" dirty="0"/>
+            <a:endParaRPr lang="en-US" sz="1100"/>
           </a:p>
         </p:txBody>
       </p:sp>
@@ -7125,7 +7085,7 @@
               <a:buNone/>
             </a:pPr>
             <a:r>
-              <a:rPr lang="en-US" sz="2400" b="1" dirty="0">
+              <a:rPr lang="en-US" sz="2400" b="1">
                 <a:solidFill>
                   <a:srgbClr val="F8FAFC"/>
                 </a:solidFill>
@@ -7135,7 +7095,7 @@
               </a:rPr>
               <a:t>6-Point Radar Metrics Evaluation</a:t>
             </a:r>
-            <a:endParaRPr lang="en-US" sz="2400" dirty="0"/>
+            <a:endParaRPr lang="en-US" sz="2400"/>
           </a:p>
         </p:txBody>
       </p:sp>
@@ -7189,7 +7149,7 @@
               <a:buNone/>
             </a:pPr>
             <a:r>
-              <a:rPr lang="en-US" sz="1400" b="1" dirty="0">
+              <a:rPr lang="en-US" sz="1400" b="1">
                 <a:solidFill>
                   <a:srgbClr val="3B82F6"/>
                 </a:solidFill>
@@ -7199,7 +7159,7 @@
               </a:rPr>
               <a:t>Communication</a:t>
             </a:r>
-            <a:endParaRPr lang="en-US" sz="1400" dirty="0"/>
+            <a:endParaRPr lang="en-US" sz="1400"/>
           </a:p>
         </p:txBody>
       </p:sp>
@@ -7228,7 +7188,7 @@
               <a:buNone/>
             </a:pPr>
             <a:r>
-              <a:rPr lang="en-US" sz="1100" dirty="0">
+              <a:rPr lang="en-US" sz="1100">
                 <a:solidFill>
                   <a:srgbClr val="94A3B8"/>
                 </a:solidFill>
@@ -7238,7 +7198,7 @@
               </a:rPr>
               <a:t>Clarity, speech pace, and structured delivery</a:t>
             </a:r>
-            <a:endParaRPr lang="en-US" sz="1100" dirty="0"/>
+            <a:endParaRPr lang="en-US" sz="1100"/>
           </a:p>
         </p:txBody>
       </p:sp>
@@ -7292,7 +7252,7 @@
               <a:buNone/>
             </a:pPr>
             <a:r>
-              <a:rPr lang="en-US" sz="1400" b="1" dirty="0">
+              <a:rPr lang="en-US" sz="1400" b="1">
                 <a:solidFill>
                   <a:srgbClr val="3B82F6"/>
                 </a:solidFill>
@@ -7302,7 +7262,7 @@
               </a:rPr>
               <a:t>Confidence</a:t>
             </a:r>
-            <a:endParaRPr lang="en-US" sz="1400" dirty="0"/>
+            <a:endParaRPr lang="en-US" sz="1400"/>
           </a:p>
         </p:txBody>
       </p:sp>
@@ -7331,7 +7291,7 @@
               <a:buNone/>
             </a:pPr>
             <a:r>
-              <a:rPr lang="en-US" sz="1100" dirty="0">
+              <a:rPr lang="en-US" sz="1100">
                 <a:solidFill>
                   <a:srgbClr val="94A3B8"/>
                 </a:solidFill>
@@ -7341,7 +7301,7 @@
               </a:rPr>
               <a:t>Vocal firmness and composure under pressure</a:t>
             </a:r>
-            <a:endParaRPr lang="en-US" sz="1100" dirty="0"/>
+            <a:endParaRPr lang="en-US" sz="1100"/>
           </a:p>
         </p:txBody>
       </p:sp>
@@ -7395,7 +7355,7 @@
               <a:buNone/>
             </a:pPr>
             <a:r>
-              <a:rPr lang="en-US" sz="1400" b="1" dirty="0">
+              <a:rPr lang="en-US" sz="1400" b="1">
                 <a:solidFill>
                   <a:srgbClr val="3B82F6"/>
                 </a:solidFill>
@@ -7405,7 +7365,7 @@
               </a:rPr>
               <a:t>Technical Depth</a:t>
             </a:r>
-            <a:endParaRPr lang="en-US" sz="1400" dirty="0"/>
+            <a:endParaRPr lang="en-US" sz="1400"/>
           </a:p>
         </p:txBody>
       </p:sp>
@@ -7434,7 +7394,7 @@
               <a:buNone/>
             </a:pPr>
             <a:r>
-              <a:rPr lang="en-US" sz="1100" dirty="0">
+              <a:rPr lang="en-US" sz="1100">
                 <a:solidFill>
                   <a:srgbClr val="94A3B8"/>
                 </a:solidFill>
@@ -7444,7 +7404,7 @@
               </a:rPr>
               <a:t>Accuracy of domain concepts and trade-offs</a:t>
             </a:r>
-            <a:endParaRPr lang="en-US" sz="1100" dirty="0"/>
+            <a:endParaRPr lang="en-US" sz="1100"/>
           </a:p>
         </p:txBody>
       </p:sp>
@@ -7498,7 +7458,7 @@
               <a:buNone/>
             </a:pPr>
             <a:r>
-              <a:rPr lang="en-US" sz="1400" b="1" dirty="0">
+              <a:rPr lang="en-US" sz="1400" b="1">
                 <a:solidFill>
                   <a:srgbClr val="3B82F6"/>
                 </a:solidFill>
@@ -7508,7 +7468,7 @@
               </a:rPr>
               <a:t>Problem Solving</a:t>
             </a:r>
-            <a:endParaRPr lang="en-US" sz="1400" dirty="0"/>
+            <a:endParaRPr lang="en-US" sz="1400"/>
           </a:p>
         </p:txBody>
       </p:sp>
@@ -7537,7 +7497,7 @@
               <a:buNone/>
             </a:pPr>
             <a:r>
-              <a:rPr lang="en-US" sz="1100" dirty="0">
+              <a:rPr lang="en-US" sz="1100">
                 <a:solidFill>
                   <a:srgbClr val="94A3B8"/>
                 </a:solidFill>
@@ -7547,7 +7507,7 @@
               </a:rPr>
               <a:t>Logical framework &amp; edge-case consideration</a:t>
             </a:r>
-            <a:endParaRPr lang="en-US" sz="1100" dirty="0"/>
+            <a:endParaRPr lang="en-US" sz="1100"/>
           </a:p>
         </p:txBody>
       </p:sp>
@@ -7601,7 +7561,7 @@
               <a:buNone/>
             </a:pPr>
             <a:r>
-              <a:rPr lang="en-US" sz="1400" b="1" dirty="0">
+              <a:rPr lang="en-US" sz="1400" b="1">
                 <a:solidFill>
                   <a:srgbClr val="3B82F6"/>
                 </a:solidFill>
@@ -7611,7 +7571,7 @@
               </a:rPr>
               <a:t>Vocabulary</a:t>
             </a:r>
-            <a:endParaRPr lang="en-US" sz="1400" dirty="0"/>
+            <a:endParaRPr lang="en-US" sz="1400"/>
           </a:p>
         </p:txBody>
       </p:sp>
@@ -7640,7 +7600,7 @@
               <a:buNone/>
             </a:pPr>
             <a:r>
-              <a:rPr lang="en-US" sz="1100" dirty="0">
+              <a:rPr lang="en-US" sz="1100">
                 <a:solidFill>
                   <a:srgbClr val="94A3B8"/>
                 </a:solidFill>
@@ -7650,7 +7610,7 @@
               </a:rPr>
               <a:t>Use of precise industry terminology</a:t>
             </a:r>
-            <a:endParaRPr lang="en-US" sz="1100" dirty="0"/>
+            <a:endParaRPr lang="en-US" sz="1100"/>
           </a:p>
         </p:txBody>
       </p:sp>
@@ -7704,7 +7664,7 @@
               <a:buNone/>
             </a:pPr>
             <a:r>
-              <a:rPr lang="en-US" sz="1400" b="1" dirty="0">
+              <a:rPr lang="en-US" sz="1400" b="1">
                 <a:solidFill>
                   <a:srgbClr val="3B82F6"/>
                 </a:solidFill>
@@ -7714,7 +7674,7 @@
               </a:rPr>
               <a:t>Grammar</a:t>
             </a:r>
-            <a:endParaRPr lang="en-US" sz="1400" dirty="0"/>
+            <a:endParaRPr lang="en-US" sz="1400"/>
           </a:p>
         </p:txBody>
       </p:sp>
@@ -7743,7 +7703,7 @@
               <a:buNone/>
             </a:pPr>
             <a:r>
-              <a:rPr lang="en-US" sz="1100" dirty="0">
+              <a:rPr lang="en-US" sz="1100">
                 <a:solidFill>
                   <a:srgbClr val="94A3B8"/>
                 </a:solidFill>
@@ -7753,7 +7713,7 @@
               </a:rPr>
               <a:t>Syntactical correctness in verbal answers</a:t>
             </a:r>
-            <a:endParaRPr lang="en-US" sz="1100" dirty="0"/>
+            <a:endParaRPr lang="en-US" sz="1100"/>
           </a:p>
         </p:txBody>
       </p:sp>
@@ -7815,7 +7775,7 @@
               <a:buNone/>
             </a:pPr>
             <a:r>
-              <a:rPr lang="en-US" sz="1100" b="1" dirty="0">
+              <a:rPr lang="en-US" sz="1100" b="1">
                 <a:solidFill>
                   <a:srgbClr val="8B5CF6"/>
                 </a:solidFill>
@@ -7825,7 +7785,7 @@
               </a:rPr>
               <a:t>SMART PERSONALIZATION</a:t>
             </a:r>
-            <a:endParaRPr lang="en-US" sz="1100" dirty="0"/>
+            <a:endParaRPr lang="en-US" sz="1100"/>
           </a:p>
         </p:txBody>
       </p:sp>
@@ -7854,7 +7814,7 @@
               <a:buNone/>
             </a:pPr>
             <a:r>
-              <a:rPr lang="en-US" sz="2400" b="1" dirty="0">
+              <a:rPr lang="en-US" sz="2400" b="1">
                 <a:solidFill>
                   <a:srgbClr val="F8FAFC"/>
                 </a:solidFill>
@@ -7864,7 +7824,7 @@
               </a:rPr>
               <a:t>Resume Skill Scanner &amp; Custom Interview</a:t>
             </a:r>
-            <a:endParaRPr lang="en-US" sz="2400" dirty="0"/>
+            <a:endParaRPr lang="en-US" sz="2400"/>
           </a:p>
         </p:txBody>
       </p:sp>
@@ -7918,7 +7878,7 @@
               <a:buNone/>
             </a:pPr>
             <a:r>
-              <a:rPr lang="en-US" sz="1800" b="1" dirty="0">
+              <a:rPr lang="en-US" sz="1800" b="1">
                 <a:solidFill>
                   <a:srgbClr val="8B5CF6"/>
                 </a:solidFill>
@@ -7928,7 +7888,7 @@
               </a:rPr>
               <a:t>Automated Resume Scanning Pipeline</a:t>
             </a:r>
-            <a:endParaRPr lang="en-US" sz="1800" dirty="0"/>
+            <a:endParaRPr lang="en-US" sz="1800"/>
           </a:p>
         </p:txBody>
       </p:sp>
@@ -7960,7 +7920,7 @@
               <a:buNone/>
             </a:pPr>
             <a:r>
-              <a:rPr lang="en-US" sz="1300" dirty="0">
+              <a:rPr lang="en-US" sz="1300">
                 <a:solidFill>
                   <a:srgbClr val="F8FAFC"/>
                 </a:solidFill>
@@ -7970,7 +7930,7 @@
               </a:rPr>
               <a:t>1. Candidate Uploads Resume PDF or Pastes Text Summary</a:t>
             </a:r>
-            <a:endParaRPr lang="en-US" sz="1300" dirty="0"/>
+            <a:endParaRPr lang="en-US" sz="1300"/>
           </a:p>
           <a:p>
             <a:pPr marL="0" indent="0">
@@ -7980,7 +7940,7 @@
               <a:buNone/>
             </a:pPr>
             <a:r>
-              <a:rPr lang="en-US" sz="1300" dirty="0">
+              <a:rPr lang="en-US" sz="1300">
                 <a:solidFill>
                   <a:srgbClr val="F8FAFC"/>
                 </a:solidFill>
@@ -7990,7 +7950,7 @@
               </a:rPr>
               <a:t>2. AI Skill Extraction Engine identifies key tech stack keywords (React, Node.js, MongoDB, Python, Docker)</a:t>
             </a:r>
-            <a:endParaRPr lang="en-US" sz="1300" dirty="0"/>
+            <a:endParaRPr lang="en-US" sz="1300"/>
           </a:p>
           <a:p>
             <a:pPr marL="0" indent="0">
@@ -8000,7 +7960,7 @@
               <a:buNone/>
             </a:pPr>
             <a:r>
-              <a:rPr lang="en-US" sz="1300" dirty="0">
+              <a:rPr lang="en-US" sz="1300">
                 <a:solidFill>
                   <a:srgbClr val="F8FAFC"/>
                 </a:solidFill>
@@ -8010,7 +7970,7 @@
               </a:rPr>
               <a:t>3. Custom Interview Question Generator creates 5 targeted questions based on candidate exact background</a:t>
             </a:r>
-            <a:endParaRPr lang="en-US" sz="1300" dirty="0"/>
+            <a:endParaRPr lang="en-US" sz="1300"/>
           </a:p>
           <a:p>
             <a:pPr marL="0" indent="0">
@@ -8020,7 +7980,7 @@
               <a:buNone/>
             </a:pPr>
             <a:r>
-              <a:rPr lang="en-US" sz="1300" dirty="0">
+              <a:rPr lang="en-US" sz="1300">
                 <a:solidFill>
                   <a:srgbClr val="F8FAFC"/>
                 </a:solidFill>
@@ -8030,7 +7990,7 @@
               </a:rPr>
               <a:t>4. Direct launch into AI Voice Interview Room tailored to resume experience</a:t>
             </a:r>
-            <a:endParaRPr lang="en-US" sz="1300" dirty="0"/>
+            <a:endParaRPr lang="en-US" sz="1300"/>
           </a:p>
         </p:txBody>
       </p:sp>
@@ -8092,7 +8052,7 @@
               <a:buNone/>
             </a:pPr>
             <a:r>
-              <a:rPr lang="en-US" sz="1100" b="1" dirty="0">
+              <a:rPr lang="en-US" sz="1100" b="1">
                 <a:solidFill>
                   <a:srgbClr val="8B5CF6"/>
                 </a:solidFill>
@@ -8102,7 +8062,7 @@
               </a:rPr>
               <a:t>COMPANY PRACTICE</a:t>
             </a:r>
-            <a:endParaRPr lang="en-US" sz="1100" dirty="0"/>
+            <a:endParaRPr lang="en-US" sz="1100"/>
           </a:p>
         </p:txBody>
       </p:sp>
@@ -8131,7 +8091,7 @@
               <a:buNone/>
             </a:pPr>
             <a:r>
-              <a:rPr lang="en-US" sz="2400" b="1" dirty="0">
+              <a:rPr lang="en-US" sz="2400" b="1">
                 <a:solidFill>
                   <a:srgbClr val="F8FAFC"/>
                 </a:solidFill>
@@ -8141,7 +8101,7 @@
               </a:rPr>
               <a:t>Top FAANG Company Interview Modules</a:t>
             </a:r>
-            <a:endParaRPr lang="en-US" sz="2400" dirty="0"/>
+            <a:endParaRPr lang="en-US" sz="2400"/>
           </a:p>
         </p:txBody>
       </p:sp>
@@ -8195,7 +8155,7 @@
               <a:buNone/>
             </a:pPr>
             <a:r>
-              <a:rPr lang="en-US" sz="1600" b="1" dirty="0">
+              <a:rPr lang="en-US" sz="1600" b="1">
                 <a:solidFill>
                   <a:srgbClr val="F8FAFC"/>
                 </a:solidFill>
@@ -8205,7 +8165,7 @@
               </a:rPr>
               <a:t>Google</a:t>
             </a:r>
-            <a:endParaRPr lang="en-US" sz="1600" dirty="0"/>
+            <a:endParaRPr lang="en-US" sz="1600"/>
           </a:p>
         </p:txBody>
       </p:sp>
@@ -8234,7 +8194,7 @@
               <a:buNone/>
             </a:pPr>
             <a:r>
-              <a:rPr lang="en-US" sz="1000" dirty="0">
+              <a:rPr lang="en-US" sz="1000">
                 <a:solidFill>
                   <a:srgbClr val="8B5CF6"/>
                 </a:solidFill>
@@ -8244,14 +8204,14 @@
               </a:rPr>
               <a:t>Hard Round</a:t>
             </a:r>
-            <a:endParaRPr lang="en-US" sz="1000" dirty="0"/>
+            <a:endParaRPr lang="en-US" sz="1000"/>
           </a:p>
           <a:p>
             <a:pPr marL="0" indent="0" algn="ctr">
               <a:buNone/>
             </a:pPr>
             <a:r>
-              <a:rPr lang="en-US" sz="1000" dirty="0">
+              <a:rPr lang="en-US" sz="1000">
                 <a:solidFill>
                   <a:srgbClr val="8B5CF6"/>
                 </a:solidFill>
@@ -8261,7 +8221,7 @@
               </a:rPr>
               <a:t>Tailored Track</a:t>
             </a:r>
-            <a:endParaRPr lang="en-US" sz="1000" dirty="0"/>
+            <a:endParaRPr lang="en-US" sz="1000"/>
           </a:p>
         </p:txBody>
       </p:sp>
@@ -8315,7 +8275,7 @@
               <a:buNone/>
             </a:pPr>
             <a:r>
-              <a:rPr lang="en-US" sz="1600" b="1" dirty="0">
+              <a:rPr lang="en-US" sz="1600" b="1">
                 <a:solidFill>
                   <a:srgbClr val="F8FAFC"/>
                 </a:solidFill>
@@ -8325,7 +8285,7 @@
               </a:rPr>
               <a:t>Amazon</a:t>
             </a:r>
-            <a:endParaRPr lang="en-US" sz="1600" dirty="0"/>
+            <a:endParaRPr lang="en-US" sz="1600"/>
           </a:p>
         </p:txBody>
       </p:sp>
@@ -8354,7 +8314,7 @@
               <a:buNone/>
             </a:pPr>
             <a:r>
-              <a:rPr lang="en-US" sz="1000" dirty="0">
+              <a:rPr lang="en-US" sz="1000">
                 <a:solidFill>
                   <a:srgbClr val="8B5CF6"/>
                 </a:solidFill>
@@ -8364,14 +8324,14 @@
               </a:rPr>
               <a:t>Hard Round</a:t>
             </a:r>
-            <a:endParaRPr lang="en-US" sz="1000" dirty="0"/>
+            <a:endParaRPr lang="en-US" sz="1000"/>
           </a:p>
           <a:p>
             <a:pPr marL="0" indent="0" algn="ctr">
               <a:buNone/>
             </a:pPr>
             <a:r>
-              <a:rPr lang="en-US" sz="1000" dirty="0">
+              <a:rPr lang="en-US" sz="1000">
                 <a:solidFill>
                   <a:srgbClr val="8B5CF6"/>
                 </a:solidFill>
@@ -8381,7 +8341,7 @@
               </a:rPr>
               <a:t>Tailored Track</a:t>
             </a:r>
-            <a:endParaRPr lang="en-US" sz="1000" dirty="0"/>
+            <a:endParaRPr lang="en-US" sz="1000"/>
           </a:p>
         </p:txBody>
       </p:sp>
@@ -8435,7 +8395,7 @@
               <a:buNone/>
             </a:pPr>
             <a:r>
-              <a:rPr lang="en-US" sz="1600" b="1" dirty="0">
+              <a:rPr lang="en-US" sz="1600" b="1">
                 <a:solidFill>
                   <a:srgbClr val="F8FAFC"/>
                 </a:solidFill>
@@ -8445,7 +8405,7 @@
               </a:rPr>
               <a:t>Microsoft</a:t>
             </a:r>
-            <a:endParaRPr lang="en-US" sz="1600" dirty="0"/>
+            <a:endParaRPr lang="en-US" sz="1600"/>
           </a:p>
         </p:txBody>
       </p:sp>
@@ -8474,7 +8434,7 @@
               <a:buNone/>
             </a:pPr>
             <a:r>
-              <a:rPr lang="en-US" sz="1000" dirty="0">
+              <a:rPr lang="en-US" sz="1000">
                 <a:solidFill>
                   <a:srgbClr val="8B5CF6"/>
                 </a:solidFill>
@@ -8484,14 +8444,14 @@
               </a:rPr>
               <a:t>Hard Round</a:t>
             </a:r>
-            <a:endParaRPr lang="en-US" sz="1000" dirty="0"/>
+            <a:endParaRPr lang="en-US" sz="1000"/>
           </a:p>
           <a:p>
             <a:pPr marL="0" indent="0" algn="ctr">
               <a:buNone/>
             </a:pPr>
             <a:r>
-              <a:rPr lang="en-US" sz="1000" dirty="0">
+              <a:rPr lang="en-US" sz="1000">
                 <a:solidFill>
                   <a:srgbClr val="8B5CF6"/>
                 </a:solidFill>
@@ -8501,7 +8461,7 @@
               </a:rPr>
               <a:t>Tailored Track</a:t>
             </a:r>
-            <a:endParaRPr lang="en-US" sz="1000" dirty="0"/>
+            <a:endParaRPr lang="en-US" sz="1000"/>
           </a:p>
         </p:txBody>
       </p:sp>
@@ -8533,7 +8493,7 @@
           <a:bodyPr/>
           <a:lstStyle/>
           <a:p>
-            <a:endParaRPr lang="en-US" dirty="0"/>
+            <a:endParaRPr lang="en-US"/>
           </a:p>
         </p:txBody>
       </p:sp>
@@ -8562,7 +8522,7 @@
               <a:buNone/>
             </a:pPr>
             <a:r>
-              <a:rPr lang="en-US" sz="1600" b="1" dirty="0">
+              <a:rPr lang="en-US" sz="1600" b="1">
                 <a:solidFill>
                   <a:srgbClr val="F8FAFC"/>
                 </a:solidFill>
@@ -8572,7 +8532,7 @@
               </a:rPr>
               <a:t>Meta</a:t>
             </a:r>
-            <a:endParaRPr lang="en-US" sz="1600" dirty="0"/>
+            <a:endParaRPr lang="en-US" sz="1600"/>
           </a:p>
         </p:txBody>
       </p:sp>
@@ -8601,7 +8561,7 @@
               <a:buNone/>
             </a:pPr>
             <a:r>
-              <a:rPr lang="en-US" sz="1000" dirty="0">
+              <a:rPr lang="en-US" sz="1000">
                 <a:solidFill>
                   <a:srgbClr val="8B5CF6"/>
                 </a:solidFill>
@@ -8611,14 +8571,14 @@
               </a:rPr>
               <a:t>Hard Round</a:t>
             </a:r>
-            <a:endParaRPr lang="en-US" sz="1000" dirty="0"/>
+            <a:endParaRPr lang="en-US" sz="1000"/>
           </a:p>
           <a:p>
             <a:pPr marL="0" indent="0" algn="ctr">
               <a:buNone/>
             </a:pPr>
             <a:r>
-              <a:rPr lang="en-US" sz="1000" dirty="0">
+              <a:rPr lang="en-US" sz="1000">
                 <a:solidFill>
                   <a:srgbClr val="8B5CF6"/>
                 </a:solidFill>
@@ -8628,7 +8588,7 @@
               </a:rPr>
               <a:t>Tailored Track</a:t>
             </a:r>
-            <a:endParaRPr lang="en-US" sz="1000" dirty="0"/>
+            <a:endParaRPr lang="en-US" sz="1000"/>
           </a:p>
         </p:txBody>
       </p:sp>
@@ -8660,7 +8620,7 @@
           <a:bodyPr/>
           <a:lstStyle/>
           <a:p>
-            <a:endParaRPr lang="en-US" dirty="0"/>
+            <a:endParaRPr lang="en-US"/>
           </a:p>
         </p:txBody>
       </p:sp>
@@ -8689,7 +8649,7 @@
               <a:buNone/>
             </a:pPr>
             <a:r>
-              <a:rPr lang="en-US" sz="1600" b="1" dirty="0">
+              <a:rPr lang="en-US" sz="1600" b="1">
                 <a:solidFill>
                   <a:srgbClr val="F8FAFC"/>
                 </a:solidFill>
@@ -8699,7 +8659,7 @@
               </a:rPr>
               <a:t>Netflix</a:t>
             </a:r>
-            <a:endParaRPr lang="en-US" sz="1600" dirty="0"/>
+            <a:endParaRPr lang="en-US" sz="1600"/>
           </a:p>
         </p:txBody>
       </p:sp>
@@ -8728,7 +8688,7 @@
               <a:buNone/>
             </a:pPr>
             <a:r>
-              <a:rPr lang="en-US" sz="1000" dirty="0">
+              <a:rPr lang="en-US" sz="1000">
                 <a:solidFill>
                   <a:srgbClr val="8B5CF6"/>
                 </a:solidFill>
@@ -8738,14 +8698,14 @@
               </a:rPr>
               <a:t>Hard Round</a:t>
             </a:r>
-            <a:endParaRPr lang="en-US" sz="1000" dirty="0"/>
+            <a:endParaRPr lang="en-US" sz="1000"/>
           </a:p>
           <a:p>
             <a:pPr marL="0" indent="0" algn="ctr">
               <a:buNone/>
             </a:pPr>
             <a:r>
-              <a:rPr lang="en-US" sz="1000" dirty="0">
+              <a:rPr lang="en-US" sz="1000">
                 <a:solidFill>
                   <a:srgbClr val="8B5CF6"/>
                 </a:solidFill>
@@ -8755,7 +8715,7 @@
               </a:rPr>
               <a:t>Tailored Track</a:t>
             </a:r>
-            <a:endParaRPr lang="en-US" sz="1000" dirty="0"/>
+            <a:endParaRPr lang="en-US" sz="1000"/>
           </a:p>
         </p:txBody>
       </p:sp>
@@ -8809,7 +8769,7 @@
               <a:buNone/>
             </a:pPr>
             <a:r>
-              <a:rPr lang="en-US" sz="1600" b="1" dirty="0">
+              <a:rPr lang="en-US" sz="1600" b="1">
                 <a:solidFill>
                   <a:srgbClr val="F8FAFC"/>
                 </a:solidFill>
@@ -8819,7 +8779,7 @@
               </a:rPr>
               <a:t>Adobe</a:t>
             </a:r>
-            <a:endParaRPr lang="en-US" sz="1600" dirty="0"/>
+            <a:endParaRPr lang="en-US" sz="1600"/>
           </a:p>
         </p:txBody>
       </p:sp>
@@ -8848,7 +8808,7 @@
               <a:buNone/>
             </a:pPr>
             <a:r>
-              <a:rPr lang="en-US" sz="1000" dirty="0">
+              <a:rPr lang="en-US" sz="1000">
                 <a:solidFill>
                   <a:srgbClr val="8B5CF6"/>
                 </a:solidFill>
@@ -8858,14 +8818,14 @@
               </a:rPr>
               <a:t>Hard Round</a:t>
             </a:r>
-            <a:endParaRPr lang="en-US" sz="1000" dirty="0"/>
+            <a:endParaRPr lang="en-US" sz="1000"/>
           </a:p>
           <a:p>
             <a:pPr marL="0" indent="0" algn="ctr">
               <a:buNone/>
             </a:pPr>
             <a:r>
-              <a:rPr lang="en-US" sz="1000" dirty="0">
+              <a:rPr lang="en-US" sz="1000">
                 <a:solidFill>
                   <a:srgbClr val="8B5CF6"/>
                 </a:solidFill>
@@ -8875,7 +8835,7 @@
               </a:rPr>
               <a:t>Tailored Track</a:t>
             </a:r>
-            <a:endParaRPr lang="en-US" sz="1000" dirty="0"/>
+            <a:endParaRPr lang="en-US" sz="1000"/>
           </a:p>
         </p:txBody>
       </p:sp>
@@ -8929,7 +8889,7 @@
               <a:buNone/>
             </a:pPr>
             <a:r>
-              <a:rPr lang="en-US" sz="1600" b="1" dirty="0">
+              <a:rPr lang="en-US" sz="1600" b="1">
                 <a:solidFill>
                   <a:srgbClr val="F8FAFC"/>
                 </a:solidFill>
@@ -8939,7 +8899,7 @@
               </a:rPr>
               <a:t>Apple</a:t>
             </a:r>
-            <a:endParaRPr lang="en-US" sz="1600" dirty="0"/>
+            <a:endParaRPr lang="en-US" sz="1600"/>
           </a:p>
         </p:txBody>
       </p:sp>
@@ -8968,7 +8928,7 @@
               <a:buNone/>
             </a:pPr>
             <a:r>
-              <a:rPr lang="en-US" sz="1000" dirty="0">
+              <a:rPr lang="en-US" sz="1000">
                 <a:solidFill>
                   <a:srgbClr val="8B5CF6"/>
                 </a:solidFill>
@@ -8978,14 +8938,14 @@
               </a:rPr>
               <a:t>Hard Round</a:t>
             </a:r>
-            <a:endParaRPr lang="en-US" sz="1000" dirty="0"/>
+            <a:endParaRPr lang="en-US" sz="1000"/>
           </a:p>
           <a:p>
             <a:pPr marL="0" indent="0" algn="ctr">
               <a:buNone/>
             </a:pPr>
             <a:r>
-              <a:rPr lang="en-US" sz="1000" dirty="0">
+              <a:rPr lang="en-US" sz="1000">
                 <a:solidFill>
                   <a:srgbClr val="8B5CF6"/>
                 </a:solidFill>
@@ -8995,7 +8955,7 @@
               </a:rPr>
               <a:t>Tailored Track</a:t>
             </a:r>
-            <a:endParaRPr lang="en-US" sz="1000" dirty="0"/>
+            <a:endParaRPr lang="en-US" sz="1000"/>
           </a:p>
         </p:txBody>
       </p:sp>
@@ -9049,7 +9009,7 @@
               <a:buNone/>
             </a:pPr>
             <a:r>
-              <a:rPr lang="en-US" sz="1600" b="1" dirty="0">
+              <a:rPr lang="en-US" sz="1600" b="1">
                 <a:solidFill>
                   <a:srgbClr val="F8FAFC"/>
                 </a:solidFill>
@@ -9059,7 +9019,7 @@
               </a:rPr>
               <a:t>Uber</a:t>
             </a:r>
-            <a:endParaRPr lang="en-US" sz="1600" dirty="0"/>
+            <a:endParaRPr lang="en-US" sz="1600"/>
           </a:p>
         </p:txBody>
       </p:sp>
@@ -9088,7 +9048,7 @@
               <a:buNone/>
             </a:pPr>
             <a:r>
-              <a:rPr lang="en-US" sz="1000" dirty="0">
+              <a:rPr lang="en-US" sz="1000">
                 <a:solidFill>
                   <a:srgbClr val="8B5CF6"/>
                 </a:solidFill>
@@ -9098,14 +9058,14 @@
               </a:rPr>
               <a:t>Hard Round</a:t>
             </a:r>
-            <a:endParaRPr lang="en-US" sz="1000" dirty="0"/>
+            <a:endParaRPr lang="en-US" sz="1000"/>
           </a:p>
           <a:p>
             <a:pPr marL="0" indent="0" algn="ctr">
               <a:buNone/>
             </a:pPr>
             <a:r>
-              <a:rPr lang="en-US" sz="1000" dirty="0">
+              <a:rPr lang="en-US" sz="1000">
                 <a:solidFill>
                   <a:srgbClr val="8B5CF6"/>
                 </a:solidFill>
@@ -9115,7 +9075,7 @@
               </a:rPr>
               <a:t>Tailored Track</a:t>
             </a:r>
-            <a:endParaRPr lang="en-US" sz="1000" dirty="0"/>
+            <a:endParaRPr lang="en-US" sz="1000"/>
           </a:p>
         </p:txBody>
       </p:sp>
@@ -9147,7 +9107,7 @@
           <a:bodyPr/>
           <a:lstStyle/>
           <a:p>
-            <a:endParaRPr lang="en-US" dirty="0"/>
+            <a:endParaRPr lang="en-US"/>
           </a:p>
         </p:txBody>
       </p:sp>
@@ -9176,7 +9136,7 @@
               <a:buNone/>
             </a:pPr>
             <a:r>
-              <a:rPr lang="en-US" sz="1600" b="1" dirty="0">
+              <a:rPr lang="en-US" sz="1600" b="1">
                 <a:solidFill>
                   <a:srgbClr val="F8FAFC"/>
                 </a:solidFill>
@@ -9186,7 +9146,7 @@
               </a:rPr>
               <a:t>LinkedIn</a:t>
             </a:r>
-            <a:endParaRPr lang="en-US" sz="1600" dirty="0"/>
+            <a:endParaRPr lang="en-US" sz="1600"/>
           </a:p>
         </p:txBody>
       </p:sp>
@@ -9215,7 +9175,7 @@
               <a:buNone/>
             </a:pPr>
             <a:r>
-              <a:rPr lang="en-US" sz="1000" dirty="0">
+              <a:rPr lang="en-US" sz="1000">
                 <a:solidFill>
                   <a:srgbClr val="8B5CF6"/>
                 </a:solidFill>
@@ -9225,14 +9185,14 @@
               </a:rPr>
               <a:t>Hard Round</a:t>
             </a:r>
-            <a:endParaRPr lang="en-US" sz="1000" dirty="0"/>
+            <a:endParaRPr lang="en-US" sz="1000"/>
           </a:p>
           <a:p>
             <a:pPr marL="0" indent="0" algn="ctr">
               <a:buNone/>
             </a:pPr>
             <a:r>
-              <a:rPr lang="en-US" sz="1000" dirty="0">
+              <a:rPr lang="en-US" sz="1000">
                 <a:solidFill>
                   <a:srgbClr val="8B5CF6"/>
                 </a:solidFill>
@@ -9242,7 +9202,7 @@
               </a:rPr>
               <a:t>Tailored Track</a:t>
             </a:r>
-            <a:endParaRPr lang="en-US" sz="1000" dirty="0"/>
+            <a:endParaRPr lang="en-US" sz="1000"/>
           </a:p>
         </p:txBody>
       </p:sp>
@@ -9296,7 +9256,7 @@
               <a:buNone/>
             </a:pPr>
             <a:r>
-              <a:rPr lang="en-US" sz="1600" b="1" dirty="0">
+              <a:rPr lang="en-US" sz="1600" b="1">
                 <a:solidFill>
                   <a:srgbClr val="F8FAFC"/>
                 </a:solidFill>
@@ -9306,7 +9266,7 @@
               </a:rPr>
               <a:t>OpenAI</a:t>
             </a:r>
-            <a:endParaRPr lang="en-US" sz="1600" dirty="0"/>
+            <a:endParaRPr lang="en-US" sz="1600"/>
           </a:p>
         </p:txBody>
       </p:sp>
@@ -9335,7 +9295,7 @@
               <a:buNone/>
             </a:pPr>
             <a:r>
-              <a:rPr lang="en-US" sz="1000" dirty="0">
+              <a:rPr lang="en-US" sz="1000">
                 <a:solidFill>
                   <a:srgbClr val="8B5CF6"/>
                 </a:solidFill>
@@ -9345,14 +9305,14 @@
               </a:rPr>
               <a:t>Hard Round</a:t>
             </a:r>
-            <a:endParaRPr lang="en-US" sz="1000" dirty="0"/>
+            <a:endParaRPr lang="en-US" sz="1000"/>
           </a:p>
           <a:p>
             <a:pPr marL="0" indent="0" algn="ctr">
               <a:buNone/>
             </a:pPr>
             <a:r>
-              <a:rPr lang="en-US" sz="1000" dirty="0">
+              <a:rPr lang="en-US" sz="1000">
                 <a:solidFill>
                   <a:srgbClr val="8B5CF6"/>
                 </a:solidFill>
@@ -9362,7 +9322,7 @@
               </a:rPr>
               <a:t>Tailored Track</a:t>
             </a:r>
-            <a:endParaRPr lang="en-US" sz="1000" dirty="0"/>
+            <a:endParaRPr lang="en-US" sz="1000"/>
           </a:p>
         </p:txBody>
       </p:sp>
